--- a/public/fun/pack/pptx/family/가족소개_19_나혼자·1인가구_반딧불마을.pptx
+++ b/public/fun/pack/pptx/family/가족소개_19_나혼자·1인가구_반딧불마을.pptx
@@ -3286,14 +3286,6 @@
 <file path=ppt/slides/slide1.xml><?xml version="1.0" encoding="utf-8"?>
 <p:sld xmlns:a="http://schemas.openxmlformats.org/drawingml/2006/main" xmlns:p="http://schemas.openxmlformats.org/presentationml/2006/main" xmlns:r="http://schemas.openxmlformats.org/officeDocument/2006/relationships">
   <p:cSld>
-    <p:bg>
-      <p:bgPr>
-        <a:solidFill>
-          <a:srgbClr val="FFFFFF"/>
-        </a:solidFill>
-        <a:effectLst/>
-      </p:bgPr>
-    </p:bg>
     <p:spTree>
       <p:nvGrpSpPr>
         <p:cNvPr id="1" name=""/>
@@ -3301,238 +3293,30 @@
         <p:nvPr/>
       </p:nvGrpSpPr>
       <p:grpSpPr/>
-      <p:sp>
-        <p:nvSpPr>
-          <p:cNvPr id="3" name="장식"/>
-          <p:cNvSpPr/>
+      <p:pic>
+        <p:nvPicPr>
+          <p:cNvPr id="3" name="표지 그림" descr="family-19.jpg"/>
+          <p:cNvPicPr>
+            <a:picLocks noChangeAspect="1"/>
+          </p:cNvPicPr>
           <p:nvPr/>
-        </p:nvSpPr>
-        <p:spPr>
-          <a:xfrm>
-            <a:off x="7071183" y="-1714500"/>
-            <a:ext cx="7886700" cy="7886700"/>
-          </a:xfrm>
-          <a:prstGeom prst="ellipse">
+        </p:nvPicPr>
+        <p:blipFill>
+          <a:blip r:embed="rId2"/>
+          <a:stretch>
+            <a:fillRect/>
+          </a:stretch>
+        </p:blipFill>
+        <p:spPr>
+          <a:xfrm>
+            <a:off x="0" y="0"/>
+            <a:ext cx="12191695" cy="6858000"/>
+          </a:xfrm>
+          <a:prstGeom prst="rect">
             <a:avLst/>
           </a:prstGeom>
-          <a:solidFill>
-            <a:srgbClr val="D0F1E6"/>
-          </a:solidFill>
-          <a:ln>
-            <a:noFill/>
-          </a:ln>
-        </p:spPr>
-        <p:txBody>
-          <a:bodyPr rtlCol="0" anchor="ctr"/>
-          <a:lstStyle/>
-          <a:p>
-            <a:pPr algn="ctr"/>
-          </a:p>
-        </p:txBody>
-      </p:sp>
-      <p:sp>
-        <p:nvSpPr>
-          <p:cNvPr id="4" name="장식"/>
-          <p:cNvSpPr/>
-          <p:nvPr/>
-        </p:nvSpPr>
-        <p:spPr>
-          <a:xfrm>
-            <a:off x="9509522" y="3977639"/>
-            <a:ext cx="3429000" cy="3429000"/>
-          </a:xfrm>
-          <a:prstGeom prst="ellipse">
-            <a:avLst/>
-          </a:prstGeom>
-          <a:solidFill>
-            <a:srgbClr val="246B53"/>
-          </a:solidFill>
-          <a:ln>
-            <a:noFill/>
-          </a:ln>
-        </p:spPr>
-        <p:txBody>
-          <a:bodyPr rtlCol="0" anchor="ctr"/>
-          <a:lstStyle/>
-          <a:p>
-            <a:pPr algn="ctr"/>
-          </a:p>
-        </p:txBody>
-      </p:sp>
-      <p:sp>
-        <p:nvSpPr>
-          <p:cNvPr id="5" name="장식"/>
-          <p:cNvSpPr/>
-          <p:nvPr/>
-        </p:nvSpPr>
-        <p:spPr>
-          <a:xfrm rot="47073">
-            <a:off x="10370041" y="1303642"/>
-            <a:ext cx="972669" cy="972669"/>
-          </a:xfrm>
-          <a:prstGeom prst="star5">
-            <a:avLst/>
-          </a:prstGeom>
-          <a:solidFill>
-            <a:srgbClr val="246B53"/>
-          </a:solidFill>
-          <a:ln>
-            <a:noFill/>
-          </a:ln>
-        </p:spPr>
-        <p:txBody>
-          <a:bodyPr rtlCol="0" anchor="ctr"/>
-          <a:lstStyle/>
-          <a:p>
-            <a:pPr algn="ctr"/>
-          </a:p>
-        </p:txBody>
-      </p:sp>
-      <p:sp>
-        <p:nvSpPr>
-          <p:cNvPr id="6" name="장식"/>
-          <p:cNvSpPr/>
-          <p:nvPr/>
-        </p:nvSpPr>
-        <p:spPr>
-          <a:xfrm rot="616000">
-            <a:off x="10966056" y="404965"/>
-            <a:ext cx="415579" cy="415579"/>
-          </a:xfrm>
-          <a:prstGeom prst="star5">
-            <a:avLst/>
-          </a:prstGeom>
-          <a:solidFill>
-            <a:srgbClr val="D0F1E6"/>
-          </a:solidFill>
-          <a:ln>
-            <a:noFill/>
-          </a:ln>
-        </p:spPr>
-        <p:txBody>
-          <a:bodyPr rtlCol="0" anchor="ctr"/>
-          <a:lstStyle/>
-          <a:p>
-            <a:pPr algn="ctr"/>
-          </a:p>
-        </p:txBody>
-      </p:sp>
-      <p:sp>
-        <p:nvSpPr>
-          <p:cNvPr id="7" name="장식"/>
-          <p:cNvSpPr/>
-          <p:nvPr/>
-        </p:nvSpPr>
-        <p:spPr>
-          <a:xfrm rot="291727">
-            <a:off x="8517029" y="1857812"/>
-            <a:ext cx="743304" cy="743304"/>
-          </a:xfrm>
-          <a:prstGeom prst="star5">
-            <a:avLst/>
-          </a:prstGeom>
-          <a:solidFill>
-            <a:srgbClr val="913B83"/>
-          </a:solidFill>
-          <a:ln>
-            <a:noFill/>
-          </a:ln>
-        </p:spPr>
-        <p:txBody>
-          <a:bodyPr rtlCol="0" anchor="ctr"/>
-          <a:lstStyle/>
-          <a:p>
-            <a:pPr algn="ctr"/>
-          </a:p>
-        </p:txBody>
-      </p:sp>
-      <p:sp>
-        <p:nvSpPr>
-          <p:cNvPr id="8" name="장식"/>
-          <p:cNvSpPr/>
-          <p:nvPr/>
-        </p:nvSpPr>
-        <p:spPr>
-          <a:xfrm rot="486238">
-            <a:off x="10732199" y="2536825"/>
-            <a:ext cx="862336" cy="862336"/>
-          </a:xfrm>
-          <a:prstGeom prst="star5">
-            <a:avLst/>
-          </a:prstGeom>
-          <a:solidFill>
-            <a:srgbClr val="246B53"/>
-          </a:solidFill>
-          <a:ln>
-            <a:noFill/>
-          </a:ln>
-        </p:spPr>
-        <p:txBody>
-          <a:bodyPr rtlCol="0" anchor="ctr"/>
-          <a:lstStyle/>
-          <a:p>
-            <a:pPr algn="ctr"/>
-          </a:p>
-        </p:txBody>
-      </p:sp>
-      <p:sp>
-        <p:nvSpPr>
-          <p:cNvPr id="9" name="장식"/>
-          <p:cNvSpPr/>
-          <p:nvPr/>
-        </p:nvSpPr>
-        <p:spPr>
-          <a:xfrm rot="21114457">
-            <a:off x="10694079" y="2423818"/>
-            <a:ext cx="852890" cy="852890"/>
-          </a:xfrm>
-          <a:prstGeom prst="star5">
-            <a:avLst/>
-          </a:prstGeom>
-          <a:solidFill>
-            <a:srgbClr val="D0F1E6"/>
-          </a:solidFill>
-          <a:ln>
-            <a:noFill/>
-          </a:ln>
-        </p:spPr>
-        <p:txBody>
-          <a:bodyPr rtlCol="0" anchor="ctr"/>
-          <a:lstStyle/>
-          <a:p>
-            <a:pPr algn="ctr"/>
-          </a:p>
-        </p:txBody>
-      </p:sp>
-      <p:sp>
-        <p:nvSpPr>
-          <p:cNvPr id="10" name="장식"/>
-          <p:cNvSpPr/>
-          <p:nvPr/>
-        </p:nvSpPr>
-        <p:spPr>
-          <a:xfrm rot="21340827">
-            <a:off x="10442192" y="1296230"/>
-            <a:ext cx="435134" cy="435134"/>
-          </a:xfrm>
-          <a:prstGeom prst="star5">
-            <a:avLst/>
-          </a:prstGeom>
-          <a:solidFill>
-            <a:srgbClr val="913B83"/>
-          </a:solidFill>
-          <a:ln>
-            <a:noFill/>
-          </a:ln>
-        </p:spPr>
-        <p:txBody>
-          <a:bodyPr rtlCol="0" anchor="ctr"/>
-          <a:lstStyle/>
-          <a:p>
-            <a:pPr algn="ctr"/>
-          </a:p>
-        </p:txBody>
-      </p:sp>
+        </p:spPr>
+      </p:pic>
       <p:sp>
         <p:nvSpPr>
           <p:cNvPr id="2" name="Title 1"/>
@@ -3546,7 +3330,7 @@
         <p:spPr>
           <a:xfrm>
             <a:off x="853418" y="2057400"/>
-            <a:ext cx="6705432" cy="1463040"/>
+            <a:ext cx="6095847" cy="1554480"/>
           </a:xfrm>
         </p:spPr>
         <p:txBody>
@@ -3573,13 +3357,13 @@
       </p:sp>
       <p:sp>
         <p:nvSpPr>
-          <p:cNvPr id="11" name="한 줄 문구"/>
+          <p:cNvPr id="4" name="한 줄 문구"/>
           <p:cNvSpPr txBox="1"/>
           <p:nvPr/>
         </p:nvSpPr>
         <p:spPr>
           <a:xfrm>
-            <a:off x="853418" y="3611880"/>
+            <a:off x="853418" y="3749039"/>
             <a:ext cx="6095847" cy="822960"/>
           </a:xfrm>
           <a:prstGeom prst="rect">
@@ -3604,20 +3388,20 @@
                   <a:srgbClr val="143D30"/>
                 </a:solidFill>
               </a:rPr>
-              <a:t>반딧불 같은 작은 추억이 모여 환해요</a:t>
-            </a:r>
-          </a:p>
-        </p:txBody>
-      </p:sp>
-      <p:sp>
-        <p:nvSpPr>
-          <p:cNvPr id="12" name="안내 문구"/>
+              <a:t>혼자 찾아간 반딧불 마을</a:t>
+            </a:r>
+          </a:p>
+        </p:txBody>
+      </p:sp>
+      <p:sp>
+        <p:nvSpPr>
+          <p:cNvPr id="5" name="안내 문구"/>
           <p:cNvSpPr txBox="1"/>
           <p:nvPr/>
         </p:nvSpPr>
         <p:spPr>
           <a:xfrm>
-            <a:off x="853418" y="4480560"/>
+            <a:off x="853418" y="4617720"/>
             <a:ext cx="6095847" cy="914400"/>
           </a:xfrm>
           <a:prstGeom prst="rect">
@@ -3642,7 +3426,7 @@
                   <a:srgbClr val="666666"/>
                 </a:solidFill>
               </a:rPr>
-              <a:t>나 혼자 · 1인 가구 · 2026. 00. 00</a:t>
+              <a:t>나 혼자 · 1인 가구 · 2027. 00. 00</a:t>
             </a:r>
           </a:p>
         </p:txBody>
@@ -3733,180 +3517,6 @@
       </p:sp>
       <p:sp>
         <p:nvSpPr>
-          <p:cNvPr id="5" name="장식"/>
-          <p:cNvSpPr/>
-          <p:nvPr/>
-        </p:nvSpPr>
-        <p:spPr>
-          <a:xfrm rot="47073">
-            <a:off x="11538365" y="657714"/>
-            <a:ext cx="339662" cy="339662"/>
-          </a:xfrm>
-          <a:prstGeom prst="star5">
-            <a:avLst/>
-          </a:prstGeom>
-          <a:solidFill>
-            <a:srgbClr val="246B53"/>
-          </a:solidFill>
-          <a:ln>
-            <a:noFill/>
-          </a:ln>
-        </p:spPr>
-        <p:txBody>
-          <a:bodyPr rtlCol="0" anchor="ctr"/>
-          <a:lstStyle/>
-          <a:p>
-            <a:pPr algn="ctr"/>
-          </a:p>
-        </p:txBody>
-      </p:sp>
-      <p:sp>
-        <p:nvSpPr>
-          <p:cNvPr id="6" name="장식"/>
-          <p:cNvSpPr/>
-          <p:nvPr/>
-        </p:nvSpPr>
-        <p:spPr>
-          <a:xfrm rot="616000">
-            <a:off x="11746497" y="343890"/>
-            <a:ext cx="145122" cy="145122"/>
-          </a:xfrm>
-          <a:prstGeom prst="star5">
-            <a:avLst/>
-          </a:prstGeom>
-          <a:solidFill>
-            <a:srgbClr val="D0F1E6"/>
-          </a:solidFill>
-          <a:ln>
-            <a:noFill/>
-          </a:ln>
-        </p:spPr>
-        <p:txBody>
-          <a:bodyPr rtlCol="0" anchor="ctr"/>
-          <a:lstStyle/>
-          <a:p>
-            <a:pPr algn="ctr"/>
-          </a:p>
-        </p:txBody>
-      </p:sp>
-      <p:sp>
-        <p:nvSpPr>
-          <p:cNvPr id="7" name="장식"/>
-          <p:cNvSpPr/>
-          <p:nvPr/>
-        </p:nvSpPr>
-        <p:spPr>
-          <a:xfrm rot="291727">
-            <a:off x="10891282" y="851234"/>
-            <a:ext cx="259566" cy="259566"/>
-          </a:xfrm>
-          <a:prstGeom prst="star5">
-            <a:avLst/>
-          </a:prstGeom>
-          <a:solidFill>
-            <a:srgbClr val="913B83"/>
-          </a:solidFill>
-          <a:ln>
-            <a:noFill/>
-          </a:ln>
-        </p:spPr>
-        <p:txBody>
-          <a:bodyPr rtlCol="0" anchor="ctr"/>
-          <a:lstStyle/>
-          <a:p>
-            <a:pPr algn="ctr"/>
-          </a:p>
-        </p:txBody>
-      </p:sp>
-      <p:sp>
-        <p:nvSpPr>
-          <p:cNvPr id="8" name="장식"/>
-          <p:cNvSpPr/>
-          <p:nvPr/>
-        </p:nvSpPr>
-        <p:spPr>
-          <a:xfrm rot="486238">
-            <a:off x="11664833" y="1088349"/>
-            <a:ext cx="301133" cy="301133"/>
-          </a:xfrm>
-          <a:prstGeom prst="star5">
-            <a:avLst/>
-          </a:prstGeom>
-          <a:solidFill>
-            <a:srgbClr val="246B53"/>
-          </a:solidFill>
-          <a:ln>
-            <a:noFill/>
-          </a:ln>
-        </p:spPr>
-        <p:txBody>
-          <a:bodyPr rtlCol="0" anchor="ctr"/>
-          <a:lstStyle/>
-          <a:p>
-            <a:pPr algn="ctr"/>
-          </a:p>
-        </p:txBody>
-      </p:sp>
-      <p:sp>
-        <p:nvSpPr>
-          <p:cNvPr id="9" name="장식"/>
-          <p:cNvSpPr/>
-          <p:nvPr/>
-        </p:nvSpPr>
-        <p:spPr>
-          <a:xfrm rot="21114457">
-            <a:off x="11651521" y="1048887"/>
-            <a:ext cx="297834" cy="297834"/>
-          </a:xfrm>
-          <a:prstGeom prst="star5">
-            <a:avLst/>
-          </a:prstGeom>
-          <a:solidFill>
-            <a:srgbClr val="D0F1E6"/>
-          </a:solidFill>
-          <a:ln>
-            <a:noFill/>
-          </a:ln>
-        </p:spPr>
-        <p:txBody>
-          <a:bodyPr rtlCol="0" anchor="ctr"/>
-          <a:lstStyle/>
-          <a:p>
-            <a:pPr algn="ctr"/>
-          </a:p>
-        </p:txBody>
-      </p:sp>
-      <p:sp>
-        <p:nvSpPr>
-          <p:cNvPr id="10" name="장식"/>
-          <p:cNvSpPr/>
-          <p:nvPr/>
-        </p:nvSpPr>
-        <p:spPr>
-          <a:xfrm rot="21340827">
-            <a:off x="11563561" y="655126"/>
-            <a:ext cx="151951" cy="151951"/>
-          </a:xfrm>
-          <a:prstGeom prst="star5">
-            <a:avLst/>
-          </a:prstGeom>
-          <a:solidFill>
-            <a:srgbClr val="913B83"/>
-          </a:solidFill>
-          <a:ln>
-            <a:noFill/>
-          </a:ln>
-        </p:spPr>
-        <p:txBody>
-          <a:bodyPr rtlCol="0" anchor="ctr"/>
-          <a:lstStyle/>
-          <a:p>
-            <a:pPr algn="ctr"/>
-          </a:p>
-        </p:txBody>
-      </p:sp>
-      <p:sp>
-        <p:nvSpPr>
           <p:cNvPr id="2" name="Title 1"/>
           <p:cNvSpPr>
             <a:spLocks noGrp="1"/>
@@ -3945,7 +3555,7 @@
       </p:sp>
       <p:sp>
         <p:nvSpPr>
-          <p:cNvPr id="11" name="사진 자리"/>
+          <p:cNvPr id="5" name="사진 자리"/>
           <p:cNvSpPr/>
           <p:nvPr/>
         </p:nvSpPr>
@@ -3991,7 +3601,7 @@
       </p:sp>
       <p:sp>
         <p:nvSpPr>
-          <p:cNvPr id="12" name="TextBox 11"/>
+          <p:cNvPr id="6" name="TextBox 5"/>
           <p:cNvSpPr txBox="1"/>
           <p:nvPr/>
         </p:nvSpPr>
@@ -4029,7 +3639,7 @@
       </p:sp>
       <p:sp>
         <p:nvSpPr>
-          <p:cNvPr id="13" name="TextBox 12"/>
+          <p:cNvPr id="7" name="TextBox 6"/>
           <p:cNvSpPr txBox="1"/>
           <p:nvPr/>
         </p:nvSpPr>
@@ -4097,7 +3707,7 @@
       </p:sp>
       <p:sp>
         <p:nvSpPr>
-          <p:cNvPr id="14" name="사진 자리"/>
+          <p:cNvPr id="8" name="사진 자리"/>
           <p:cNvSpPr/>
           <p:nvPr/>
         </p:nvSpPr>
@@ -4143,7 +3753,7 @@
       </p:sp>
       <p:sp>
         <p:nvSpPr>
-          <p:cNvPr id="15" name="TextBox 14"/>
+          <p:cNvPr id="9" name="TextBox 8"/>
           <p:cNvSpPr txBox="1"/>
           <p:nvPr/>
         </p:nvSpPr>
@@ -4181,7 +3791,7 @@
       </p:sp>
       <p:sp>
         <p:nvSpPr>
-          <p:cNvPr id="16" name="TextBox 15"/>
+          <p:cNvPr id="10" name="TextBox 9"/>
           <p:cNvSpPr txBox="1"/>
           <p:nvPr/>
         </p:nvSpPr>
@@ -4249,7 +3859,7 @@
       </p:sp>
       <p:sp>
         <p:nvSpPr>
-          <p:cNvPr id="17" name="사진 자리"/>
+          <p:cNvPr id="11" name="사진 자리"/>
           <p:cNvSpPr/>
           <p:nvPr/>
         </p:nvSpPr>
@@ -4295,7 +3905,7 @@
       </p:sp>
       <p:sp>
         <p:nvSpPr>
-          <p:cNvPr id="18" name="TextBox 17"/>
+          <p:cNvPr id="12" name="TextBox 11"/>
           <p:cNvSpPr txBox="1"/>
           <p:nvPr/>
         </p:nvSpPr>
@@ -4333,7 +3943,7 @@
       </p:sp>
       <p:sp>
         <p:nvSpPr>
-          <p:cNvPr id="19" name="TextBox 18"/>
+          <p:cNvPr id="13" name="TextBox 12"/>
           <p:cNvSpPr txBox="1"/>
           <p:nvPr/>
         </p:nvSpPr>
@@ -4485,180 +4095,6 @@
       </p:sp>
       <p:sp>
         <p:nvSpPr>
-          <p:cNvPr id="5" name="장식"/>
-          <p:cNvSpPr/>
-          <p:nvPr/>
-        </p:nvSpPr>
-        <p:spPr>
-          <a:xfrm rot="47073">
-            <a:off x="11538365" y="657714"/>
-            <a:ext cx="339662" cy="339662"/>
-          </a:xfrm>
-          <a:prstGeom prst="star5">
-            <a:avLst/>
-          </a:prstGeom>
-          <a:solidFill>
-            <a:srgbClr val="246B53"/>
-          </a:solidFill>
-          <a:ln>
-            <a:noFill/>
-          </a:ln>
-        </p:spPr>
-        <p:txBody>
-          <a:bodyPr rtlCol="0" anchor="ctr"/>
-          <a:lstStyle/>
-          <a:p>
-            <a:pPr algn="ctr"/>
-          </a:p>
-        </p:txBody>
-      </p:sp>
-      <p:sp>
-        <p:nvSpPr>
-          <p:cNvPr id="6" name="장식"/>
-          <p:cNvSpPr/>
-          <p:nvPr/>
-        </p:nvSpPr>
-        <p:spPr>
-          <a:xfrm rot="616000">
-            <a:off x="11746497" y="343890"/>
-            <a:ext cx="145122" cy="145122"/>
-          </a:xfrm>
-          <a:prstGeom prst="star5">
-            <a:avLst/>
-          </a:prstGeom>
-          <a:solidFill>
-            <a:srgbClr val="D0F1E6"/>
-          </a:solidFill>
-          <a:ln>
-            <a:noFill/>
-          </a:ln>
-        </p:spPr>
-        <p:txBody>
-          <a:bodyPr rtlCol="0" anchor="ctr"/>
-          <a:lstStyle/>
-          <a:p>
-            <a:pPr algn="ctr"/>
-          </a:p>
-        </p:txBody>
-      </p:sp>
-      <p:sp>
-        <p:nvSpPr>
-          <p:cNvPr id="7" name="장식"/>
-          <p:cNvSpPr/>
-          <p:nvPr/>
-        </p:nvSpPr>
-        <p:spPr>
-          <a:xfrm rot="291727">
-            <a:off x="10891282" y="851234"/>
-            <a:ext cx="259566" cy="259566"/>
-          </a:xfrm>
-          <a:prstGeom prst="star5">
-            <a:avLst/>
-          </a:prstGeom>
-          <a:solidFill>
-            <a:srgbClr val="913B83"/>
-          </a:solidFill>
-          <a:ln>
-            <a:noFill/>
-          </a:ln>
-        </p:spPr>
-        <p:txBody>
-          <a:bodyPr rtlCol="0" anchor="ctr"/>
-          <a:lstStyle/>
-          <a:p>
-            <a:pPr algn="ctr"/>
-          </a:p>
-        </p:txBody>
-      </p:sp>
-      <p:sp>
-        <p:nvSpPr>
-          <p:cNvPr id="8" name="장식"/>
-          <p:cNvSpPr/>
-          <p:nvPr/>
-        </p:nvSpPr>
-        <p:spPr>
-          <a:xfrm rot="486238">
-            <a:off x="11664833" y="1088349"/>
-            <a:ext cx="301133" cy="301133"/>
-          </a:xfrm>
-          <a:prstGeom prst="star5">
-            <a:avLst/>
-          </a:prstGeom>
-          <a:solidFill>
-            <a:srgbClr val="246B53"/>
-          </a:solidFill>
-          <a:ln>
-            <a:noFill/>
-          </a:ln>
-        </p:spPr>
-        <p:txBody>
-          <a:bodyPr rtlCol="0" anchor="ctr"/>
-          <a:lstStyle/>
-          <a:p>
-            <a:pPr algn="ctr"/>
-          </a:p>
-        </p:txBody>
-      </p:sp>
-      <p:sp>
-        <p:nvSpPr>
-          <p:cNvPr id="9" name="장식"/>
-          <p:cNvSpPr/>
-          <p:nvPr/>
-        </p:nvSpPr>
-        <p:spPr>
-          <a:xfrm rot="21114457">
-            <a:off x="11651521" y="1048887"/>
-            <a:ext cx="297834" cy="297834"/>
-          </a:xfrm>
-          <a:prstGeom prst="star5">
-            <a:avLst/>
-          </a:prstGeom>
-          <a:solidFill>
-            <a:srgbClr val="D0F1E6"/>
-          </a:solidFill>
-          <a:ln>
-            <a:noFill/>
-          </a:ln>
-        </p:spPr>
-        <p:txBody>
-          <a:bodyPr rtlCol="0" anchor="ctr"/>
-          <a:lstStyle/>
-          <a:p>
-            <a:pPr algn="ctr"/>
-          </a:p>
-        </p:txBody>
-      </p:sp>
-      <p:sp>
-        <p:nvSpPr>
-          <p:cNvPr id="10" name="장식"/>
-          <p:cNvSpPr/>
-          <p:nvPr/>
-        </p:nvSpPr>
-        <p:spPr>
-          <a:xfrm rot="21340827">
-            <a:off x="11563561" y="655126"/>
-            <a:ext cx="151951" cy="151951"/>
-          </a:xfrm>
-          <a:prstGeom prst="star5">
-            <a:avLst/>
-          </a:prstGeom>
-          <a:solidFill>
-            <a:srgbClr val="913B83"/>
-          </a:solidFill>
-          <a:ln>
-            <a:noFill/>
-          </a:ln>
-        </p:spPr>
-        <p:txBody>
-          <a:bodyPr rtlCol="0" anchor="ctr"/>
-          <a:lstStyle/>
-          <a:p>
-            <a:pPr algn="ctr"/>
-          </a:p>
-        </p:txBody>
-      </p:sp>
-      <p:sp>
-        <p:nvSpPr>
           <p:cNvPr id="2" name="Title 1"/>
           <p:cNvSpPr>
             <a:spLocks noGrp="1"/>
@@ -4697,7 +4133,7 @@
       </p:sp>
       <p:sp>
         <p:nvSpPr>
-          <p:cNvPr id="11" name="타임라인 선"/>
+          <p:cNvPr id="5" name="타임라인 선"/>
           <p:cNvSpPr/>
           <p:nvPr/>
         </p:nvSpPr>
@@ -4726,7 +4162,7 @@
       </p:sp>
       <p:sp>
         <p:nvSpPr>
-          <p:cNvPr id="12" name="때 1"/>
+          <p:cNvPr id="6" name="때 1"/>
           <p:cNvSpPr/>
           <p:nvPr/>
         </p:nvSpPr>
@@ -4757,7 +4193,7 @@
       </p:sp>
       <p:sp>
         <p:nvSpPr>
-          <p:cNvPr id="13" name="TextBox 12"/>
+          <p:cNvPr id="7" name="TextBox 6"/>
           <p:cNvSpPr txBox="1"/>
           <p:nvPr/>
         </p:nvSpPr>
@@ -4795,7 +4231,7 @@
       </p:sp>
       <p:sp>
         <p:nvSpPr>
-          <p:cNvPr id="14" name="TextBox 13"/>
+          <p:cNvPr id="8" name="TextBox 7"/>
           <p:cNvSpPr txBox="1"/>
           <p:nvPr/>
         </p:nvSpPr>
@@ -4833,7 +4269,7 @@
       </p:sp>
       <p:sp>
         <p:nvSpPr>
-          <p:cNvPr id="15" name="TextBox 14"/>
+          <p:cNvPr id="9" name="TextBox 8"/>
           <p:cNvSpPr txBox="1"/>
           <p:nvPr/>
         </p:nvSpPr>
@@ -4871,7 +4307,7 @@
       </p:sp>
       <p:sp>
         <p:nvSpPr>
-          <p:cNvPr id="16" name="때 2"/>
+          <p:cNvPr id="10" name="때 2"/>
           <p:cNvSpPr/>
           <p:nvPr/>
         </p:nvSpPr>
@@ -4902,7 +4338,7 @@
       </p:sp>
       <p:sp>
         <p:nvSpPr>
-          <p:cNvPr id="17" name="TextBox 16"/>
+          <p:cNvPr id="11" name="TextBox 10"/>
           <p:cNvSpPr txBox="1"/>
           <p:nvPr/>
         </p:nvSpPr>
@@ -4940,7 +4376,7 @@
       </p:sp>
       <p:sp>
         <p:nvSpPr>
-          <p:cNvPr id="18" name="TextBox 17"/>
+          <p:cNvPr id="12" name="TextBox 11"/>
           <p:cNvSpPr txBox="1"/>
           <p:nvPr/>
         </p:nvSpPr>
@@ -4978,7 +4414,7 @@
       </p:sp>
       <p:sp>
         <p:nvSpPr>
-          <p:cNvPr id="19" name="TextBox 18"/>
+          <p:cNvPr id="13" name="TextBox 12"/>
           <p:cNvSpPr txBox="1"/>
           <p:nvPr/>
         </p:nvSpPr>
@@ -5016,7 +4452,7 @@
       </p:sp>
       <p:sp>
         <p:nvSpPr>
-          <p:cNvPr id="20" name="때 3"/>
+          <p:cNvPr id="14" name="때 3"/>
           <p:cNvSpPr/>
           <p:nvPr/>
         </p:nvSpPr>
@@ -5047,7 +4483,7 @@
       </p:sp>
       <p:sp>
         <p:nvSpPr>
-          <p:cNvPr id="21" name="TextBox 20"/>
+          <p:cNvPr id="15" name="TextBox 14"/>
           <p:cNvSpPr txBox="1"/>
           <p:nvPr/>
         </p:nvSpPr>
@@ -5085,7 +4521,7 @@
       </p:sp>
       <p:sp>
         <p:nvSpPr>
-          <p:cNvPr id="22" name="TextBox 21"/>
+          <p:cNvPr id="16" name="TextBox 15"/>
           <p:cNvSpPr txBox="1"/>
           <p:nvPr/>
         </p:nvSpPr>
@@ -5123,7 +4559,7 @@
       </p:sp>
       <p:sp>
         <p:nvSpPr>
-          <p:cNvPr id="23" name="TextBox 22"/>
+          <p:cNvPr id="17" name="TextBox 16"/>
           <p:cNvSpPr txBox="1"/>
           <p:nvPr/>
         </p:nvSpPr>
@@ -5161,7 +4597,7 @@
       </p:sp>
       <p:sp>
         <p:nvSpPr>
-          <p:cNvPr id="24" name="때 4"/>
+          <p:cNvPr id="18" name="때 4"/>
           <p:cNvSpPr/>
           <p:nvPr/>
         </p:nvSpPr>
@@ -5192,7 +4628,7 @@
       </p:sp>
       <p:sp>
         <p:nvSpPr>
-          <p:cNvPr id="25" name="TextBox 24"/>
+          <p:cNvPr id="19" name="TextBox 18"/>
           <p:cNvSpPr txBox="1"/>
           <p:nvPr/>
         </p:nvSpPr>
@@ -5230,7 +4666,7 @@
       </p:sp>
       <p:sp>
         <p:nvSpPr>
-          <p:cNvPr id="26" name="TextBox 25"/>
+          <p:cNvPr id="20" name="TextBox 19"/>
           <p:cNvSpPr txBox="1"/>
           <p:nvPr/>
         </p:nvSpPr>
@@ -5268,7 +4704,7 @@
       </p:sp>
       <p:sp>
         <p:nvSpPr>
-          <p:cNvPr id="27" name="TextBox 26"/>
+          <p:cNvPr id="21" name="TextBox 20"/>
           <p:cNvSpPr txBox="1"/>
           <p:nvPr/>
         </p:nvSpPr>
@@ -5390,180 +4826,6 @@
       </p:sp>
       <p:sp>
         <p:nvSpPr>
-          <p:cNvPr id="5" name="장식"/>
-          <p:cNvSpPr/>
-          <p:nvPr/>
-        </p:nvSpPr>
-        <p:spPr>
-          <a:xfrm rot="47073">
-            <a:off x="11538365" y="657714"/>
-            <a:ext cx="339662" cy="339662"/>
-          </a:xfrm>
-          <a:prstGeom prst="star5">
-            <a:avLst/>
-          </a:prstGeom>
-          <a:solidFill>
-            <a:srgbClr val="246B53"/>
-          </a:solidFill>
-          <a:ln>
-            <a:noFill/>
-          </a:ln>
-        </p:spPr>
-        <p:txBody>
-          <a:bodyPr rtlCol="0" anchor="ctr"/>
-          <a:lstStyle/>
-          <a:p>
-            <a:pPr algn="ctr"/>
-          </a:p>
-        </p:txBody>
-      </p:sp>
-      <p:sp>
-        <p:nvSpPr>
-          <p:cNvPr id="6" name="장식"/>
-          <p:cNvSpPr/>
-          <p:nvPr/>
-        </p:nvSpPr>
-        <p:spPr>
-          <a:xfrm rot="616000">
-            <a:off x="11746497" y="343890"/>
-            <a:ext cx="145122" cy="145122"/>
-          </a:xfrm>
-          <a:prstGeom prst="star5">
-            <a:avLst/>
-          </a:prstGeom>
-          <a:solidFill>
-            <a:srgbClr val="D0F1E6"/>
-          </a:solidFill>
-          <a:ln>
-            <a:noFill/>
-          </a:ln>
-        </p:spPr>
-        <p:txBody>
-          <a:bodyPr rtlCol="0" anchor="ctr"/>
-          <a:lstStyle/>
-          <a:p>
-            <a:pPr algn="ctr"/>
-          </a:p>
-        </p:txBody>
-      </p:sp>
-      <p:sp>
-        <p:nvSpPr>
-          <p:cNvPr id="7" name="장식"/>
-          <p:cNvSpPr/>
-          <p:nvPr/>
-        </p:nvSpPr>
-        <p:spPr>
-          <a:xfrm rot="291727">
-            <a:off x="10891282" y="851234"/>
-            <a:ext cx="259566" cy="259566"/>
-          </a:xfrm>
-          <a:prstGeom prst="star5">
-            <a:avLst/>
-          </a:prstGeom>
-          <a:solidFill>
-            <a:srgbClr val="913B83"/>
-          </a:solidFill>
-          <a:ln>
-            <a:noFill/>
-          </a:ln>
-        </p:spPr>
-        <p:txBody>
-          <a:bodyPr rtlCol="0" anchor="ctr"/>
-          <a:lstStyle/>
-          <a:p>
-            <a:pPr algn="ctr"/>
-          </a:p>
-        </p:txBody>
-      </p:sp>
-      <p:sp>
-        <p:nvSpPr>
-          <p:cNvPr id="8" name="장식"/>
-          <p:cNvSpPr/>
-          <p:nvPr/>
-        </p:nvSpPr>
-        <p:spPr>
-          <a:xfrm rot="486238">
-            <a:off x="11664833" y="1088349"/>
-            <a:ext cx="301133" cy="301133"/>
-          </a:xfrm>
-          <a:prstGeom prst="star5">
-            <a:avLst/>
-          </a:prstGeom>
-          <a:solidFill>
-            <a:srgbClr val="246B53"/>
-          </a:solidFill>
-          <a:ln>
-            <a:noFill/>
-          </a:ln>
-        </p:spPr>
-        <p:txBody>
-          <a:bodyPr rtlCol="0" anchor="ctr"/>
-          <a:lstStyle/>
-          <a:p>
-            <a:pPr algn="ctr"/>
-          </a:p>
-        </p:txBody>
-      </p:sp>
-      <p:sp>
-        <p:nvSpPr>
-          <p:cNvPr id="9" name="장식"/>
-          <p:cNvSpPr/>
-          <p:nvPr/>
-        </p:nvSpPr>
-        <p:spPr>
-          <a:xfrm rot="21114457">
-            <a:off x="11651521" y="1048887"/>
-            <a:ext cx="297834" cy="297834"/>
-          </a:xfrm>
-          <a:prstGeom prst="star5">
-            <a:avLst/>
-          </a:prstGeom>
-          <a:solidFill>
-            <a:srgbClr val="D0F1E6"/>
-          </a:solidFill>
-          <a:ln>
-            <a:noFill/>
-          </a:ln>
-        </p:spPr>
-        <p:txBody>
-          <a:bodyPr rtlCol="0" anchor="ctr"/>
-          <a:lstStyle/>
-          <a:p>
-            <a:pPr algn="ctr"/>
-          </a:p>
-        </p:txBody>
-      </p:sp>
-      <p:sp>
-        <p:nvSpPr>
-          <p:cNvPr id="10" name="장식"/>
-          <p:cNvSpPr/>
-          <p:nvPr/>
-        </p:nvSpPr>
-        <p:spPr>
-          <a:xfrm rot="21340827">
-            <a:off x="11563561" y="655126"/>
-            <a:ext cx="151951" cy="151951"/>
-          </a:xfrm>
-          <a:prstGeom prst="star5">
-            <a:avLst/>
-          </a:prstGeom>
-          <a:solidFill>
-            <a:srgbClr val="913B83"/>
-          </a:solidFill>
-          <a:ln>
-            <a:noFill/>
-          </a:ln>
-        </p:spPr>
-        <p:txBody>
-          <a:bodyPr rtlCol="0" anchor="ctr"/>
-          <a:lstStyle/>
-          <a:p>
-            <a:pPr algn="ctr"/>
-          </a:p>
-        </p:txBody>
-      </p:sp>
-      <p:sp>
-        <p:nvSpPr>
           <p:cNvPr id="2" name="Title 1"/>
           <p:cNvSpPr>
             <a:spLocks noGrp="1"/>
@@ -5602,7 +4864,7 @@
       </p:sp>
       <p:sp>
         <p:nvSpPr>
-          <p:cNvPr id="11" name="줄 1"/>
+          <p:cNvPr id="5" name="줄 1"/>
           <p:cNvSpPr/>
           <p:nvPr/>
         </p:nvSpPr>
@@ -5635,7 +4897,7 @@
       </p:sp>
       <p:sp>
         <p:nvSpPr>
-          <p:cNvPr id="12" name="번호 1"/>
+          <p:cNvPr id="6" name="번호 1"/>
           <p:cNvSpPr/>
           <p:nvPr/>
         </p:nvSpPr>
@@ -5678,7 +4940,7 @@
       </p:sp>
       <p:sp>
         <p:nvSpPr>
-          <p:cNvPr id="13" name="TextBox 12"/>
+          <p:cNvPr id="7" name="TextBox 6"/>
           <p:cNvSpPr txBox="1"/>
           <p:nvPr/>
         </p:nvSpPr>
@@ -5716,7 +4978,7 @@
       </p:sp>
       <p:sp>
         <p:nvSpPr>
-          <p:cNvPr id="14" name="TextBox 13"/>
+          <p:cNvPr id="8" name="TextBox 7"/>
           <p:cNvSpPr txBox="1"/>
           <p:nvPr/>
         </p:nvSpPr>
@@ -5754,7 +5016,7 @@
       </p:sp>
       <p:sp>
         <p:nvSpPr>
-          <p:cNvPr id="15" name="줄 2"/>
+          <p:cNvPr id="9" name="줄 2"/>
           <p:cNvSpPr/>
           <p:nvPr/>
         </p:nvSpPr>
@@ -5787,7 +5049,7 @@
       </p:sp>
       <p:sp>
         <p:nvSpPr>
-          <p:cNvPr id="16" name="번호 2"/>
+          <p:cNvPr id="10" name="번호 2"/>
           <p:cNvSpPr/>
           <p:nvPr/>
         </p:nvSpPr>
@@ -5830,7 +5092,7 @@
       </p:sp>
       <p:sp>
         <p:nvSpPr>
-          <p:cNvPr id="17" name="TextBox 16"/>
+          <p:cNvPr id="11" name="TextBox 10"/>
           <p:cNvSpPr txBox="1"/>
           <p:nvPr/>
         </p:nvSpPr>
@@ -5868,7 +5130,7 @@
       </p:sp>
       <p:sp>
         <p:nvSpPr>
-          <p:cNvPr id="18" name="TextBox 17"/>
+          <p:cNvPr id="12" name="TextBox 11"/>
           <p:cNvSpPr txBox="1"/>
           <p:nvPr/>
         </p:nvSpPr>
@@ -5906,7 +5168,7 @@
       </p:sp>
       <p:sp>
         <p:nvSpPr>
-          <p:cNvPr id="19" name="줄 3"/>
+          <p:cNvPr id="13" name="줄 3"/>
           <p:cNvSpPr/>
           <p:nvPr/>
         </p:nvSpPr>
@@ -5939,7 +5201,7 @@
       </p:sp>
       <p:sp>
         <p:nvSpPr>
-          <p:cNvPr id="20" name="번호 3"/>
+          <p:cNvPr id="14" name="번호 3"/>
           <p:cNvSpPr/>
           <p:nvPr/>
         </p:nvSpPr>
@@ -5982,7 +5244,7 @@
       </p:sp>
       <p:sp>
         <p:nvSpPr>
-          <p:cNvPr id="21" name="TextBox 20"/>
+          <p:cNvPr id="15" name="TextBox 14"/>
           <p:cNvSpPr txBox="1"/>
           <p:nvPr/>
         </p:nvSpPr>
@@ -6020,7 +5282,7 @@
       </p:sp>
       <p:sp>
         <p:nvSpPr>
-          <p:cNvPr id="22" name="TextBox 21"/>
+          <p:cNvPr id="16" name="TextBox 15"/>
           <p:cNvSpPr txBox="1"/>
           <p:nvPr/>
         </p:nvSpPr>
@@ -6142,180 +5404,6 @@
       </p:sp>
       <p:sp>
         <p:nvSpPr>
-          <p:cNvPr id="5" name="장식"/>
-          <p:cNvSpPr/>
-          <p:nvPr/>
-        </p:nvSpPr>
-        <p:spPr>
-          <a:xfrm rot="47073">
-            <a:off x="11538365" y="657714"/>
-            <a:ext cx="339662" cy="339662"/>
-          </a:xfrm>
-          <a:prstGeom prst="star5">
-            <a:avLst/>
-          </a:prstGeom>
-          <a:solidFill>
-            <a:srgbClr val="246B53"/>
-          </a:solidFill>
-          <a:ln>
-            <a:noFill/>
-          </a:ln>
-        </p:spPr>
-        <p:txBody>
-          <a:bodyPr rtlCol="0" anchor="ctr"/>
-          <a:lstStyle/>
-          <a:p>
-            <a:pPr algn="ctr"/>
-          </a:p>
-        </p:txBody>
-      </p:sp>
-      <p:sp>
-        <p:nvSpPr>
-          <p:cNvPr id="6" name="장식"/>
-          <p:cNvSpPr/>
-          <p:nvPr/>
-        </p:nvSpPr>
-        <p:spPr>
-          <a:xfrm rot="616000">
-            <a:off x="11746497" y="343890"/>
-            <a:ext cx="145122" cy="145122"/>
-          </a:xfrm>
-          <a:prstGeom prst="star5">
-            <a:avLst/>
-          </a:prstGeom>
-          <a:solidFill>
-            <a:srgbClr val="D0F1E6"/>
-          </a:solidFill>
-          <a:ln>
-            <a:noFill/>
-          </a:ln>
-        </p:spPr>
-        <p:txBody>
-          <a:bodyPr rtlCol="0" anchor="ctr"/>
-          <a:lstStyle/>
-          <a:p>
-            <a:pPr algn="ctr"/>
-          </a:p>
-        </p:txBody>
-      </p:sp>
-      <p:sp>
-        <p:nvSpPr>
-          <p:cNvPr id="7" name="장식"/>
-          <p:cNvSpPr/>
-          <p:nvPr/>
-        </p:nvSpPr>
-        <p:spPr>
-          <a:xfrm rot="291727">
-            <a:off x="10891282" y="851234"/>
-            <a:ext cx="259566" cy="259566"/>
-          </a:xfrm>
-          <a:prstGeom prst="star5">
-            <a:avLst/>
-          </a:prstGeom>
-          <a:solidFill>
-            <a:srgbClr val="913B83"/>
-          </a:solidFill>
-          <a:ln>
-            <a:noFill/>
-          </a:ln>
-        </p:spPr>
-        <p:txBody>
-          <a:bodyPr rtlCol="0" anchor="ctr"/>
-          <a:lstStyle/>
-          <a:p>
-            <a:pPr algn="ctr"/>
-          </a:p>
-        </p:txBody>
-      </p:sp>
-      <p:sp>
-        <p:nvSpPr>
-          <p:cNvPr id="8" name="장식"/>
-          <p:cNvSpPr/>
-          <p:nvPr/>
-        </p:nvSpPr>
-        <p:spPr>
-          <a:xfrm rot="486238">
-            <a:off x="11664833" y="1088349"/>
-            <a:ext cx="301133" cy="301133"/>
-          </a:xfrm>
-          <a:prstGeom prst="star5">
-            <a:avLst/>
-          </a:prstGeom>
-          <a:solidFill>
-            <a:srgbClr val="246B53"/>
-          </a:solidFill>
-          <a:ln>
-            <a:noFill/>
-          </a:ln>
-        </p:spPr>
-        <p:txBody>
-          <a:bodyPr rtlCol="0" anchor="ctr"/>
-          <a:lstStyle/>
-          <a:p>
-            <a:pPr algn="ctr"/>
-          </a:p>
-        </p:txBody>
-      </p:sp>
-      <p:sp>
-        <p:nvSpPr>
-          <p:cNvPr id="9" name="장식"/>
-          <p:cNvSpPr/>
-          <p:nvPr/>
-        </p:nvSpPr>
-        <p:spPr>
-          <a:xfrm rot="21114457">
-            <a:off x="11651521" y="1048887"/>
-            <a:ext cx="297834" cy="297834"/>
-          </a:xfrm>
-          <a:prstGeom prst="star5">
-            <a:avLst/>
-          </a:prstGeom>
-          <a:solidFill>
-            <a:srgbClr val="D0F1E6"/>
-          </a:solidFill>
-          <a:ln>
-            <a:noFill/>
-          </a:ln>
-        </p:spPr>
-        <p:txBody>
-          <a:bodyPr rtlCol="0" anchor="ctr"/>
-          <a:lstStyle/>
-          <a:p>
-            <a:pPr algn="ctr"/>
-          </a:p>
-        </p:txBody>
-      </p:sp>
-      <p:sp>
-        <p:nvSpPr>
-          <p:cNvPr id="10" name="장식"/>
-          <p:cNvSpPr/>
-          <p:nvPr/>
-        </p:nvSpPr>
-        <p:spPr>
-          <a:xfrm rot="21340827">
-            <a:off x="11563561" y="655126"/>
-            <a:ext cx="151951" cy="151951"/>
-          </a:xfrm>
-          <a:prstGeom prst="star5">
-            <a:avLst/>
-          </a:prstGeom>
-          <a:solidFill>
-            <a:srgbClr val="913B83"/>
-          </a:solidFill>
-          <a:ln>
-            <a:noFill/>
-          </a:ln>
-        </p:spPr>
-        <p:txBody>
-          <a:bodyPr rtlCol="0" anchor="ctr"/>
-          <a:lstStyle/>
-          <a:p>
-            <a:pPr algn="ctr"/>
-          </a:p>
-        </p:txBody>
-      </p:sp>
-      <p:sp>
-        <p:nvSpPr>
           <p:cNvPr id="2" name="Title 1"/>
           <p:cNvSpPr>
             <a:spLocks noGrp="1"/>
@@ -6354,7 +5442,7 @@
       </p:sp>
       <p:sp>
         <p:nvSpPr>
-          <p:cNvPr id="11" name="사진 자리"/>
+          <p:cNvPr id="5" name="사진 자리"/>
           <p:cNvSpPr/>
           <p:nvPr/>
         </p:nvSpPr>
@@ -6402,7 +5490,7 @@
       </p:sp>
       <p:sp>
         <p:nvSpPr>
-          <p:cNvPr id="12" name="사진 자리"/>
+          <p:cNvPr id="6" name="사진 자리"/>
           <p:cNvSpPr/>
           <p:nvPr/>
         </p:nvSpPr>
@@ -6450,7 +5538,7 @@
       </p:sp>
       <p:sp>
         <p:nvSpPr>
-          <p:cNvPr id="13" name="사진 자리"/>
+          <p:cNvPr id="7" name="사진 자리"/>
           <p:cNvSpPr/>
           <p:nvPr/>
         </p:nvSpPr>
@@ -6498,7 +5586,7 @@
       </p:sp>
       <p:sp>
         <p:nvSpPr>
-          <p:cNvPr id="14" name="사진 자리"/>
+          <p:cNvPr id="8" name="사진 자리"/>
           <p:cNvSpPr/>
           <p:nvPr/>
         </p:nvSpPr>
@@ -6546,7 +5634,7 @@
       </p:sp>
       <p:sp>
         <p:nvSpPr>
-          <p:cNvPr id="15" name="사진 자리"/>
+          <p:cNvPr id="9" name="사진 자리"/>
           <p:cNvSpPr/>
           <p:nvPr/>
         </p:nvSpPr>
@@ -6594,7 +5682,7 @@
       </p:sp>
       <p:sp>
         <p:nvSpPr>
-          <p:cNvPr id="16" name="사진 자리"/>
+          <p:cNvPr id="10" name="사진 자리"/>
           <p:cNvSpPr/>
           <p:nvPr/>
         </p:nvSpPr>
@@ -6651,14 +5739,6 @@
 <file path=ppt/slides/slide6.xml><?xml version="1.0" encoding="utf-8"?>
 <p:sld xmlns:a="http://schemas.openxmlformats.org/drawingml/2006/main" xmlns:p="http://schemas.openxmlformats.org/presentationml/2006/main" xmlns:r="http://schemas.openxmlformats.org/officeDocument/2006/relationships">
   <p:cSld>
-    <p:bg>
-      <p:bgPr>
-        <a:solidFill>
-          <a:srgbClr val="FFFFFF"/>
-        </a:solidFill>
-        <a:effectLst/>
-      </p:bgPr>
-    </p:bg>
     <p:spTree>
       <p:nvGrpSpPr>
         <p:cNvPr id="1" name=""/>
@@ -6666,238 +5746,30 @@
         <p:nvPr/>
       </p:nvGrpSpPr>
       <p:grpSpPr/>
-      <p:sp>
-        <p:nvSpPr>
-          <p:cNvPr id="3" name="장식"/>
-          <p:cNvSpPr/>
+      <p:pic>
+        <p:nvPicPr>
+          <p:cNvPr id="3" name="표지 그림" descr="family-19.jpg"/>
+          <p:cNvPicPr>
+            <a:picLocks noChangeAspect="1"/>
+          </p:cNvPicPr>
           <p:nvPr/>
-        </p:nvSpPr>
-        <p:spPr>
-          <a:xfrm>
-            <a:off x="7071183" y="-1714500"/>
-            <a:ext cx="7886700" cy="7886700"/>
-          </a:xfrm>
-          <a:prstGeom prst="ellipse">
+        </p:nvPicPr>
+        <p:blipFill>
+          <a:blip r:embed="rId2"/>
+          <a:stretch>
+            <a:fillRect/>
+          </a:stretch>
+        </p:blipFill>
+        <p:spPr>
+          <a:xfrm>
+            <a:off x="0" y="0"/>
+            <a:ext cx="12191695" cy="6858000"/>
+          </a:xfrm>
+          <a:prstGeom prst="rect">
             <a:avLst/>
           </a:prstGeom>
-          <a:solidFill>
-            <a:srgbClr val="D0F1E6"/>
-          </a:solidFill>
-          <a:ln>
-            <a:noFill/>
-          </a:ln>
-        </p:spPr>
-        <p:txBody>
-          <a:bodyPr rtlCol="0" anchor="ctr"/>
-          <a:lstStyle/>
-          <a:p>
-            <a:pPr algn="ctr"/>
-          </a:p>
-        </p:txBody>
-      </p:sp>
-      <p:sp>
-        <p:nvSpPr>
-          <p:cNvPr id="4" name="장식"/>
-          <p:cNvSpPr/>
-          <p:nvPr/>
-        </p:nvSpPr>
-        <p:spPr>
-          <a:xfrm>
-            <a:off x="9509522" y="3977639"/>
-            <a:ext cx="3429000" cy="3429000"/>
-          </a:xfrm>
-          <a:prstGeom prst="ellipse">
-            <a:avLst/>
-          </a:prstGeom>
-          <a:solidFill>
-            <a:srgbClr val="246B53"/>
-          </a:solidFill>
-          <a:ln>
-            <a:noFill/>
-          </a:ln>
-        </p:spPr>
-        <p:txBody>
-          <a:bodyPr rtlCol="0" anchor="ctr"/>
-          <a:lstStyle/>
-          <a:p>
-            <a:pPr algn="ctr"/>
-          </a:p>
-        </p:txBody>
-      </p:sp>
-      <p:sp>
-        <p:nvSpPr>
-          <p:cNvPr id="5" name="장식"/>
-          <p:cNvSpPr/>
-          <p:nvPr/>
-        </p:nvSpPr>
-        <p:spPr>
-          <a:xfrm rot="47073">
-            <a:off x="10370041" y="1303642"/>
-            <a:ext cx="972669" cy="972669"/>
-          </a:xfrm>
-          <a:prstGeom prst="star5">
-            <a:avLst/>
-          </a:prstGeom>
-          <a:solidFill>
-            <a:srgbClr val="246B53"/>
-          </a:solidFill>
-          <a:ln>
-            <a:noFill/>
-          </a:ln>
-        </p:spPr>
-        <p:txBody>
-          <a:bodyPr rtlCol="0" anchor="ctr"/>
-          <a:lstStyle/>
-          <a:p>
-            <a:pPr algn="ctr"/>
-          </a:p>
-        </p:txBody>
-      </p:sp>
-      <p:sp>
-        <p:nvSpPr>
-          <p:cNvPr id="6" name="장식"/>
-          <p:cNvSpPr/>
-          <p:nvPr/>
-        </p:nvSpPr>
-        <p:spPr>
-          <a:xfrm rot="616000">
-            <a:off x="10966056" y="404965"/>
-            <a:ext cx="415579" cy="415579"/>
-          </a:xfrm>
-          <a:prstGeom prst="star5">
-            <a:avLst/>
-          </a:prstGeom>
-          <a:solidFill>
-            <a:srgbClr val="D0F1E6"/>
-          </a:solidFill>
-          <a:ln>
-            <a:noFill/>
-          </a:ln>
-        </p:spPr>
-        <p:txBody>
-          <a:bodyPr rtlCol="0" anchor="ctr"/>
-          <a:lstStyle/>
-          <a:p>
-            <a:pPr algn="ctr"/>
-          </a:p>
-        </p:txBody>
-      </p:sp>
-      <p:sp>
-        <p:nvSpPr>
-          <p:cNvPr id="7" name="장식"/>
-          <p:cNvSpPr/>
-          <p:nvPr/>
-        </p:nvSpPr>
-        <p:spPr>
-          <a:xfrm rot="291727">
-            <a:off x="8517029" y="1857812"/>
-            <a:ext cx="743304" cy="743304"/>
-          </a:xfrm>
-          <a:prstGeom prst="star5">
-            <a:avLst/>
-          </a:prstGeom>
-          <a:solidFill>
-            <a:srgbClr val="913B83"/>
-          </a:solidFill>
-          <a:ln>
-            <a:noFill/>
-          </a:ln>
-        </p:spPr>
-        <p:txBody>
-          <a:bodyPr rtlCol="0" anchor="ctr"/>
-          <a:lstStyle/>
-          <a:p>
-            <a:pPr algn="ctr"/>
-          </a:p>
-        </p:txBody>
-      </p:sp>
-      <p:sp>
-        <p:nvSpPr>
-          <p:cNvPr id="8" name="장식"/>
-          <p:cNvSpPr/>
-          <p:nvPr/>
-        </p:nvSpPr>
-        <p:spPr>
-          <a:xfrm rot="486238">
-            <a:off x="10732199" y="2536825"/>
-            <a:ext cx="862336" cy="862336"/>
-          </a:xfrm>
-          <a:prstGeom prst="star5">
-            <a:avLst/>
-          </a:prstGeom>
-          <a:solidFill>
-            <a:srgbClr val="246B53"/>
-          </a:solidFill>
-          <a:ln>
-            <a:noFill/>
-          </a:ln>
-        </p:spPr>
-        <p:txBody>
-          <a:bodyPr rtlCol="0" anchor="ctr"/>
-          <a:lstStyle/>
-          <a:p>
-            <a:pPr algn="ctr"/>
-          </a:p>
-        </p:txBody>
-      </p:sp>
-      <p:sp>
-        <p:nvSpPr>
-          <p:cNvPr id="9" name="장식"/>
-          <p:cNvSpPr/>
-          <p:nvPr/>
-        </p:nvSpPr>
-        <p:spPr>
-          <a:xfrm rot="21114457">
-            <a:off x="10694079" y="2423818"/>
-            <a:ext cx="852890" cy="852890"/>
-          </a:xfrm>
-          <a:prstGeom prst="star5">
-            <a:avLst/>
-          </a:prstGeom>
-          <a:solidFill>
-            <a:srgbClr val="D0F1E6"/>
-          </a:solidFill>
-          <a:ln>
-            <a:noFill/>
-          </a:ln>
-        </p:spPr>
-        <p:txBody>
-          <a:bodyPr rtlCol="0" anchor="ctr"/>
-          <a:lstStyle/>
-          <a:p>
-            <a:pPr algn="ctr"/>
-          </a:p>
-        </p:txBody>
-      </p:sp>
-      <p:sp>
-        <p:nvSpPr>
-          <p:cNvPr id="10" name="장식"/>
-          <p:cNvSpPr/>
-          <p:nvPr/>
-        </p:nvSpPr>
-        <p:spPr>
-          <a:xfrm rot="21340827">
-            <a:off x="10442192" y="1296230"/>
-            <a:ext cx="435134" cy="435134"/>
-          </a:xfrm>
-          <a:prstGeom prst="star5">
-            <a:avLst/>
-          </a:prstGeom>
-          <a:solidFill>
-            <a:srgbClr val="913B83"/>
-          </a:solidFill>
-          <a:ln>
-            <a:noFill/>
-          </a:ln>
-        </p:spPr>
-        <p:txBody>
-          <a:bodyPr rtlCol="0" anchor="ctr"/>
-          <a:lstStyle/>
-          <a:p>
-            <a:pPr algn="ctr"/>
-          </a:p>
-        </p:txBody>
-      </p:sp>
+        </p:spPr>
+      </p:pic>
       <p:sp>
         <p:nvSpPr>
           <p:cNvPr id="2" name="Title 1"/>
@@ -6911,7 +5783,7 @@
         <p:spPr>
           <a:xfrm>
             <a:off x="853418" y="2057400"/>
-            <a:ext cx="6705432" cy="1463040"/>
+            <a:ext cx="6095847" cy="1554480"/>
           </a:xfrm>
         </p:spPr>
         <p:txBody>
@@ -6931,20 +5803,20 @@
                   <a:srgbClr val="143D30"/>
                 </a:solidFill>
               </a:rPr>
-              <a:t>우리 가족을 소개했어요</a:t>
-            </a:r>
-          </a:p>
-        </p:txBody>
-      </p:sp>
-      <p:sp>
-        <p:nvSpPr>
-          <p:cNvPr id="11" name="한 줄 문구"/>
+              <a:t>우리 가족 소개를 마칩니다</a:t>
+            </a:r>
+          </a:p>
+        </p:txBody>
+      </p:sp>
+      <p:sp>
+        <p:nvSpPr>
+          <p:cNvPr id="4" name="한 줄 문구"/>
           <p:cNvSpPr txBox="1"/>
           <p:nvPr/>
         </p:nvSpPr>
         <p:spPr>
           <a:xfrm>
-            <a:off x="853418" y="3611880"/>
+            <a:off x="853418" y="3749039"/>
             <a:ext cx="6095847" cy="822960"/>
           </a:xfrm>
           <a:prstGeom prst="rect">
@@ -6969,20 +5841,20 @@
                   <a:srgbClr val="143D30"/>
                 </a:solidFill>
               </a:rPr>
-              <a:t>함께여서 늘 든든합니다</a:t>
-            </a:r>
-          </a:p>
-        </p:txBody>
-      </p:sp>
-      <p:sp>
-        <p:nvSpPr>
-          <p:cNvPr id="12" name="안내 문구"/>
+              <a:t>읽어 주셔서 고맙습니다</a:t>
+            </a:r>
+          </a:p>
+        </p:txBody>
+      </p:sp>
+      <p:sp>
+        <p:nvSpPr>
+          <p:cNvPr id="5" name="안내 문구"/>
           <p:cNvSpPr txBox="1"/>
           <p:nvPr/>
         </p:nvSpPr>
         <p:spPr>
           <a:xfrm>
-            <a:off x="853418" y="4480560"/>
+            <a:off x="853418" y="4617720"/>
             <a:ext cx="6095847" cy="914400"/>
           </a:xfrm>
           <a:prstGeom prst="rect">

--- a/public/fun/pack/pptx/family/가족소개_19_나혼자·1인가구_반딧불마을.pptx
+++ b/public/fun/pack/pptx/family/가족소개_19_나혼자·1인가구_반딧불마을.pptx
@@ -3347,7 +3347,7 @@
             <a:r>
               <a:rPr sz="3600" b="1" i="0">
                 <a:solidFill>
-                  <a:srgbClr val="143D30"/>
+                  <a:srgbClr val="115F45"/>
                 </a:solidFill>
               </a:rPr>
               <a:t>우리 가족을 소개합니다</a:t>
@@ -3385,7 +3385,7 @@
             <a:r>
               <a:rPr sz="1700" b="0" i="1">
                 <a:solidFill>
-                  <a:srgbClr val="143D30"/>
+                  <a:srgbClr val="115F45"/>
                 </a:solidFill>
               </a:rPr>
               <a:t>혼자 찾아간 반딧불 마을</a:t>
@@ -3472,7 +3472,7 @@
             <a:avLst/>
           </a:prstGeom>
           <a:solidFill>
-            <a:srgbClr val="D0F1E6"/>
+            <a:srgbClr val="D1FAEC"/>
           </a:solidFill>
           <a:ln>
             <a:noFill/>
@@ -3501,7 +3501,7 @@
             <a:avLst/>
           </a:prstGeom>
           <a:solidFill>
-            <a:srgbClr val="246B53"/>
+            <a:srgbClr val="26C590"/>
           </a:solidFill>
           <a:ln>
             <a:noFill/>
@@ -3545,7 +3545,7 @@
             <a:r>
               <a:rPr sz="3000" b="1" i="0">
                 <a:solidFill>
-                  <a:srgbClr val="143D30"/>
+                  <a:srgbClr val="115F45"/>
                 </a:solidFill>
               </a:rPr>
               <a:t>가족 구성원</a:t>
@@ -3568,11 +3568,11 @@
             <a:avLst/>
           </a:prstGeom>
           <a:solidFill>
-            <a:srgbClr val="D0F1E6"/>
+            <a:srgbClr val="D1FAEC"/>
           </a:solidFill>
           <a:ln w="19050">
             <a:solidFill>
-              <a:srgbClr val="246B53"/>
+              <a:srgbClr val="26C590"/>
             </a:solidFill>
             <a:prstDash val="dash"/>
           </a:ln>
@@ -3591,7 +3591,7 @@
             <a:r>
               <a:rPr sz="1200" b="0" i="0">
                 <a:solidFill>
-                  <a:srgbClr val="143D30"/>
+                  <a:srgbClr val="115F45"/>
                 </a:solidFill>
               </a:rPr>
               <a:t>사진</a:t>
@@ -3629,7 +3629,7 @@
             <a:r>
               <a:rPr sz="1600" b="1" i="0">
                 <a:solidFill>
-                  <a:srgbClr val="143D30"/>
+                  <a:srgbClr val="115F45"/>
                 </a:solidFill>
               </a:rPr>
               <a:t>나</a:t>
@@ -3720,11 +3720,11 @@
             <a:avLst/>
           </a:prstGeom>
           <a:solidFill>
-            <a:srgbClr val="D0F1E6"/>
+            <a:srgbClr val="D1FAEC"/>
           </a:solidFill>
           <a:ln w="19050">
             <a:solidFill>
-              <a:srgbClr val="246B53"/>
+              <a:srgbClr val="26C590"/>
             </a:solidFill>
             <a:prstDash val="dash"/>
           </a:ln>
@@ -3743,7 +3743,7 @@
             <a:r>
               <a:rPr sz="1200" b="0" i="0">
                 <a:solidFill>
-                  <a:srgbClr val="143D30"/>
+                  <a:srgbClr val="115F45"/>
                 </a:solidFill>
               </a:rPr>
               <a:t>사진</a:t>
@@ -3781,7 +3781,7 @@
             <a:r>
               <a:rPr sz="1600" b="1" i="0">
                 <a:solidFill>
-                  <a:srgbClr val="143D30"/>
+                  <a:srgbClr val="115F45"/>
                 </a:solidFill>
               </a:rPr>
               <a:t>내 공간</a:t>
@@ -3872,11 +3872,11 @@
             <a:avLst/>
           </a:prstGeom>
           <a:solidFill>
-            <a:srgbClr val="D0F1E6"/>
+            <a:srgbClr val="D1FAEC"/>
           </a:solidFill>
           <a:ln w="19050">
             <a:solidFill>
-              <a:srgbClr val="246B53"/>
+              <a:srgbClr val="26C590"/>
             </a:solidFill>
             <a:prstDash val="dash"/>
           </a:ln>
@@ -3895,7 +3895,7 @@
             <a:r>
               <a:rPr sz="1200" b="0" i="0">
                 <a:solidFill>
-                  <a:srgbClr val="143D30"/>
+                  <a:srgbClr val="115F45"/>
                 </a:solidFill>
               </a:rPr>
               <a:t>사진</a:t>
@@ -3933,7 +3933,7 @@
             <a:r>
               <a:rPr sz="1600" b="1" i="0">
                 <a:solidFill>
-                  <a:srgbClr val="143D30"/>
+                  <a:srgbClr val="115F45"/>
                 </a:solidFill>
               </a:rPr>
               <a:t>내 하루</a:t>
@@ -4050,7 +4050,7 @@
             <a:avLst/>
           </a:prstGeom>
           <a:solidFill>
-            <a:srgbClr val="D0F1E6"/>
+            <a:srgbClr val="D1FAEC"/>
           </a:solidFill>
           <a:ln>
             <a:noFill/>
@@ -4079,7 +4079,7 @@
             <a:avLst/>
           </a:prstGeom>
           <a:solidFill>
-            <a:srgbClr val="246B53"/>
+            <a:srgbClr val="26C590"/>
           </a:solidFill>
           <a:ln>
             <a:noFill/>
@@ -4123,7 +4123,7 @@
             <a:r>
               <a:rPr sz="3000" b="1" i="0">
                 <a:solidFill>
-                  <a:srgbClr val="143D30"/>
+                  <a:srgbClr val="115F45"/>
                 </a:solidFill>
               </a:rPr>
               <a:t>우리 가족 이야기</a:t>
@@ -4146,7 +4146,7 @@
             <a:avLst/>
           </a:prstGeom>
           <a:solidFill>
-            <a:srgbClr val="D0F1E6"/>
+            <a:srgbClr val="D1FAEC"/>
           </a:solidFill>
           <a:ln>
             <a:noFill/>
@@ -4175,7 +4175,7 @@
             <a:avLst/>
           </a:prstGeom>
           <a:solidFill>
-            <a:srgbClr val="246B53"/>
+            <a:srgbClr val="26C590"/>
           </a:solidFill>
           <a:ln w="38100">
             <a:solidFill>
@@ -4221,7 +4221,7 @@
             <a:r>
               <a:rPr sz="1600" b="1" i="0">
                 <a:solidFill>
-                  <a:srgbClr val="246B53"/>
+                  <a:srgbClr val="26C590"/>
                 </a:solidFill>
               </a:rPr>
               <a:t>태어난 곳</a:t>
@@ -4259,7 +4259,7 @@
             <a:r>
               <a:rPr sz="1800" b="1" i="0">
                 <a:solidFill>
-                  <a:srgbClr val="143D30"/>
+                  <a:srgbClr val="115F45"/>
                 </a:solidFill>
               </a:rPr>
               <a:t>나의 뿌리</a:t>
@@ -4320,7 +4320,7 @@
             <a:avLst/>
           </a:prstGeom>
           <a:solidFill>
-            <a:srgbClr val="246B53"/>
+            <a:srgbClr val="26C590"/>
           </a:solidFill>
           <a:ln w="38100">
             <a:solidFill>
@@ -4366,7 +4366,7 @@
             <a:r>
               <a:rPr sz="1600" b="1" i="0">
                 <a:solidFill>
-                  <a:srgbClr val="246B53"/>
+                  <a:srgbClr val="26C590"/>
                 </a:solidFill>
               </a:rPr>
               <a:t>학창 시절</a:t>
@@ -4404,7 +4404,7 @@
             <a:r>
               <a:rPr sz="1800" b="1" i="0">
                 <a:solidFill>
-                  <a:srgbClr val="143D30"/>
+                  <a:srgbClr val="115F45"/>
                 </a:solidFill>
               </a:rPr>
               <a:t>자라던 시간</a:t>
@@ -4465,7 +4465,7 @@
             <a:avLst/>
           </a:prstGeom>
           <a:solidFill>
-            <a:srgbClr val="246B53"/>
+            <a:srgbClr val="26C590"/>
           </a:solidFill>
           <a:ln w="38100">
             <a:solidFill>
@@ -4511,7 +4511,7 @@
             <a:r>
               <a:rPr sz="1600" b="1" i="0">
                 <a:solidFill>
-                  <a:srgbClr val="246B53"/>
+                  <a:srgbClr val="26C590"/>
                 </a:solidFill>
               </a:rPr>
               <a:t>혼자 시작한 날</a:t>
@@ -4549,7 +4549,7 @@
             <a:r>
               <a:rPr sz="1800" b="1" i="0">
                 <a:solidFill>
-                  <a:srgbClr val="143D30"/>
+                  <a:srgbClr val="115F45"/>
                 </a:solidFill>
               </a:rPr>
               <a:t>나의 첫 집</a:t>
@@ -4610,7 +4610,7 @@
             <a:avLst/>
           </a:prstGeom>
           <a:solidFill>
-            <a:srgbClr val="246B53"/>
+            <a:srgbClr val="26C590"/>
           </a:solidFill>
           <a:ln w="38100">
             <a:solidFill>
@@ -4656,7 +4656,7 @@
             <a:r>
               <a:rPr sz="1600" b="1" i="0">
                 <a:solidFill>
-                  <a:srgbClr val="246B53"/>
+                  <a:srgbClr val="26C590"/>
                 </a:solidFill>
               </a:rPr>
               <a:t>지금</a:t>
@@ -4694,7 +4694,7 @@
             <a:r>
               <a:rPr sz="1800" b="1" i="0">
                 <a:solidFill>
-                  <a:srgbClr val="143D30"/>
+                  <a:srgbClr val="115F45"/>
                 </a:solidFill>
               </a:rPr>
               <a:t>오늘의 나</a:t>
@@ -4781,7 +4781,7 @@
             <a:avLst/>
           </a:prstGeom>
           <a:solidFill>
-            <a:srgbClr val="D0F1E6"/>
+            <a:srgbClr val="D1FAEC"/>
           </a:solidFill>
           <a:ln>
             <a:noFill/>
@@ -4810,7 +4810,7 @@
             <a:avLst/>
           </a:prstGeom>
           <a:solidFill>
-            <a:srgbClr val="246B53"/>
+            <a:srgbClr val="26C590"/>
           </a:solidFill>
           <a:ln>
             <a:noFill/>
@@ -4854,7 +4854,7 @@
             <a:r>
               <a:rPr sz="3000" b="1" i="0">
                 <a:solidFill>
-                  <a:srgbClr val="143D30"/>
+                  <a:srgbClr val="115F45"/>
                 </a:solidFill>
               </a:rPr>
               <a:t>우리 가족의 약속</a:t>
@@ -4879,11 +4879,11 @@
             </a:avLst>
           </a:prstGeom>
           <a:solidFill>
-            <a:srgbClr val="F0FAF6"/>
+            <a:srgbClr val="EEFCF7"/>
           </a:solidFill>
           <a:ln w="12700">
             <a:solidFill>
-              <a:srgbClr val="D0F1E6"/>
+              <a:srgbClr val="D1FAEC"/>
             </a:solidFill>
           </a:ln>
         </p:spPr>
@@ -4910,7 +4910,7 @@
             <a:avLst/>
           </a:prstGeom>
           <a:solidFill>
-            <a:srgbClr val="246B53"/>
+            <a:srgbClr val="26C590"/>
           </a:solidFill>
           <a:ln>
             <a:noFill/>
@@ -4968,7 +4968,7 @@
             <a:r>
               <a:rPr sz="1800" b="1" i="0">
                 <a:solidFill>
-                  <a:srgbClr val="143D30"/>
+                  <a:srgbClr val="115F45"/>
                 </a:solidFill>
               </a:rPr>
               <a:t>약속 1</a:t>
@@ -5031,11 +5031,11 @@
             </a:avLst>
           </a:prstGeom>
           <a:solidFill>
-            <a:srgbClr val="F0FAF6"/>
+            <a:srgbClr val="EEFCF7"/>
           </a:solidFill>
           <a:ln w="12700">
             <a:solidFill>
-              <a:srgbClr val="D0F1E6"/>
+              <a:srgbClr val="D1FAEC"/>
             </a:solidFill>
           </a:ln>
         </p:spPr>
@@ -5062,7 +5062,7 @@
             <a:avLst/>
           </a:prstGeom>
           <a:solidFill>
-            <a:srgbClr val="246B53"/>
+            <a:srgbClr val="26C590"/>
           </a:solidFill>
           <a:ln>
             <a:noFill/>
@@ -5120,7 +5120,7 @@
             <a:r>
               <a:rPr sz="1800" b="1" i="0">
                 <a:solidFill>
-                  <a:srgbClr val="143D30"/>
+                  <a:srgbClr val="115F45"/>
                 </a:solidFill>
               </a:rPr>
               <a:t>약속 2</a:t>
@@ -5183,11 +5183,11 @@
             </a:avLst>
           </a:prstGeom>
           <a:solidFill>
-            <a:srgbClr val="F0FAF6"/>
+            <a:srgbClr val="EEFCF7"/>
           </a:solidFill>
           <a:ln w="12700">
             <a:solidFill>
-              <a:srgbClr val="D0F1E6"/>
+              <a:srgbClr val="D1FAEC"/>
             </a:solidFill>
           </a:ln>
         </p:spPr>
@@ -5214,7 +5214,7 @@
             <a:avLst/>
           </a:prstGeom>
           <a:solidFill>
-            <a:srgbClr val="246B53"/>
+            <a:srgbClr val="26C590"/>
           </a:solidFill>
           <a:ln>
             <a:noFill/>
@@ -5272,7 +5272,7 @@
             <a:r>
               <a:rPr sz="1800" b="1" i="0">
                 <a:solidFill>
-                  <a:srgbClr val="143D30"/>
+                  <a:srgbClr val="115F45"/>
                 </a:solidFill>
               </a:rPr>
               <a:t>약속 3</a:t>
@@ -5359,7 +5359,7 @@
             <a:avLst/>
           </a:prstGeom>
           <a:solidFill>
-            <a:srgbClr val="D0F1E6"/>
+            <a:srgbClr val="D1FAEC"/>
           </a:solidFill>
           <a:ln>
             <a:noFill/>
@@ -5388,7 +5388,7 @@
             <a:avLst/>
           </a:prstGeom>
           <a:solidFill>
-            <a:srgbClr val="246B53"/>
+            <a:srgbClr val="26C590"/>
           </a:solidFill>
           <a:ln>
             <a:noFill/>
@@ -5432,7 +5432,7 @@
             <a:r>
               <a:rPr sz="3000" b="1" i="0">
                 <a:solidFill>
-                  <a:srgbClr val="143D30"/>
+                  <a:srgbClr val="115F45"/>
                 </a:solidFill>
               </a:rPr>
               <a:t>가족 사진</a:t>
@@ -5457,11 +5457,11 @@
             </a:avLst>
           </a:prstGeom>
           <a:solidFill>
-            <a:srgbClr val="D0F1E6"/>
+            <a:srgbClr val="D1FAEC"/>
           </a:solidFill>
           <a:ln w="19050">
             <a:solidFill>
-              <a:srgbClr val="246B53"/>
+              <a:srgbClr val="26C590"/>
             </a:solidFill>
             <a:prstDash val="dash"/>
           </a:ln>
@@ -5480,7 +5480,7 @@
             <a:r>
               <a:rPr sz="1200" b="0" i="0">
                 <a:solidFill>
-                  <a:srgbClr val="143D30"/>
+                  <a:srgbClr val="115F45"/>
                 </a:solidFill>
               </a:rPr>
               <a:t>사진 1</a:t>
@@ -5505,11 +5505,11 @@
             </a:avLst>
           </a:prstGeom>
           <a:solidFill>
-            <a:srgbClr val="D0F1E6"/>
+            <a:srgbClr val="D1FAEC"/>
           </a:solidFill>
           <a:ln w="19050">
             <a:solidFill>
-              <a:srgbClr val="246B53"/>
+              <a:srgbClr val="26C590"/>
             </a:solidFill>
             <a:prstDash val="dash"/>
           </a:ln>
@@ -5528,7 +5528,7 @@
             <a:r>
               <a:rPr sz="1200" b="0" i="0">
                 <a:solidFill>
-                  <a:srgbClr val="143D30"/>
+                  <a:srgbClr val="115F45"/>
                 </a:solidFill>
               </a:rPr>
               <a:t>사진 2</a:t>
@@ -5553,11 +5553,11 @@
             </a:avLst>
           </a:prstGeom>
           <a:solidFill>
-            <a:srgbClr val="D0F1E6"/>
+            <a:srgbClr val="D1FAEC"/>
           </a:solidFill>
           <a:ln w="19050">
             <a:solidFill>
-              <a:srgbClr val="246B53"/>
+              <a:srgbClr val="26C590"/>
             </a:solidFill>
             <a:prstDash val="dash"/>
           </a:ln>
@@ -5576,7 +5576,7 @@
             <a:r>
               <a:rPr sz="1200" b="0" i="0">
                 <a:solidFill>
-                  <a:srgbClr val="143D30"/>
+                  <a:srgbClr val="115F45"/>
                 </a:solidFill>
               </a:rPr>
               <a:t>사진 3</a:t>
@@ -5601,11 +5601,11 @@
             </a:avLst>
           </a:prstGeom>
           <a:solidFill>
-            <a:srgbClr val="D0F1E6"/>
+            <a:srgbClr val="D1FAEC"/>
           </a:solidFill>
           <a:ln w="19050">
             <a:solidFill>
-              <a:srgbClr val="246B53"/>
+              <a:srgbClr val="26C590"/>
             </a:solidFill>
             <a:prstDash val="dash"/>
           </a:ln>
@@ -5624,7 +5624,7 @@
             <a:r>
               <a:rPr sz="1200" b="0" i="0">
                 <a:solidFill>
-                  <a:srgbClr val="143D30"/>
+                  <a:srgbClr val="115F45"/>
                 </a:solidFill>
               </a:rPr>
               <a:t>사진 4</a:t>
@@ -5649,11 +5649,11 @@
             </a:avLst>
           </a:prstGeom>
           <a:solidFill>
-            <a:srgbClr val="D0F1E6"/>
+            <a:srgbClr val="D1FAEC"/>
           </a:solidFill>
           <a:ln w="19050">
             <a:solidFill>
-              <a:srgbClr val="246B53"/>
+              <a:srgbClr val="26C590"/>
             </a:solidFill>
             <a:prstDash val="dash"/>
           </a:ln>
@@ -5672,7 +5672,7 @@
             <a:r>
               <a:rPr sz="1200" b="0" i="0">
                 <a:solidFill>
-                  <a:srgbClr val="143D30"/>
+                  <a:srgbClr val="115F45"/>
                 </a:solidFill>
               </a:rPr>
               <a:t>사진 5</a:t>
@@ -5697,11 +5697,11 @@
             </a:avLst>
           </a:prstGeom>
           <a:solidFill>
-            <a:srgbClr val="D0F1E6"/>
+            <a:srgbClr val="D1FAEC"/>
           </a:solidFill>
           <a:ln w="19050">
             <a:solidFill>
-              <a:srgbClr val="246B53"/>
+              <a:srgbClr val="26C590"/>
             </a:solidFill>
             <a:prstDash val="dash"/>
           </a:ln>
@@ -5720,7 +5720,7 @@
             <a:r>
               <a:rPr sz="1200" b="0" i="0">
                 <a:solidFill>
-                  <a:srgbClr val="143D30"/>
+                  <a:srgbClr val="115F45"/>
                 </a:solidFill>
               </a:rPr>
               <a:t>사진 6</a:t>
@@ -5800,7 +5800,7 @@
             <a:r>
               <a:rPr sz="3600" b="1" i="0">
                 <a:solidFill>
-                  <a:srgbClr val="143D30"/>
+                  <a:srgbClr val="115F45"/>
                 </a:solidFill>
               </a:rPr>
               <a:t>우리 가족 소개를 마칩니다</a:t>
@@ -5838,7 +5838,7 @@
             <a:r>
               <a:rPr sz="1700" b="0" i="1">
                 <a:solidFill>
-                  <a:srgbClr val="143D30"/>
+                  <a:srgbClr val="115F45"/>
                 </a:solidFill>
               </a:rPr>
               <a:t>읽어 주셔서 고맙습니다</a:t>
@@ -5903,34 +5903,34 @@
         <a:sysClr val="window" lastClr="FFFFFF"/>
       </a:lt1>
       <a:dk2>
-        <a:srgbClr val="143D30"/>
+        <a:srgbClr val="115F45"/>
       </a:dk2>
       <a:lt2>
-        <a:srgbClr val="F0FAF6"/>
+        <a:srgbClr val="EEFCF7"/>
       </a:lt2>
       <a:accent1>
-        <a:srgbClr val="246B53"/>
+        <a:srgbClr val="26C590"/>
       </a:accent1>
       <a:accent2>
-        <a:srgbClr val="913B83"/>
+        <a:srgbClr val="209DB6"/>
       </a:accent2>
       <a:accent3>
-        <a:srgbClr val="143D30"/>
+        <a:srgbClr val="115F45"/>
       </a:accent3>
       <a:accent4>
-        <a:srgbClr val="D0F1E6"/>
+        <a:srgbClr val="D1FAEC"/>
       </a:accent4>
       <a:accent5>
-        <a:srgbClr val="5A536B"/>
+        <a:srgbClr val="23B1A3"/>
       </a:accent5>
       <a:accent6>
-        <a:srgbClr val="728B83"/>
+        <a:srgbClr val="709F8F"/>
       </a:accent6>
       <a:hlink>
-        <a:srgbClr val="246B53"/>
+        <a:srgbClr val="26C590"/>
       </a:hlink>
       <a:folHlink>
-        <a:srgbClr val="143D30"/>
+        <a:srgbClr val="115F45"/>
       </a:folHlink>
     </a:clrScheme>
     <a:fontScheme name="Office">

--- a/public/fun/pack/pptx/family/가족소개_19_나혼자·1인가구_반딧불마을.pptx
+++ b/public/fun/pack/pptx/family/가족소개_19_나혼자·1인가구_반딧불마을.pptx
@@ -3286,6 +3286,14 @@
 <file path=ppt/slides/slide1.xml><?xml version="1.0" encoding="utf-8"?>
 <p:sld xmlns:a="http://schemas.openxmlformats.org/drawingml/2006/main" xmlns:p="http://schemas.openxmlformats.org/presentationml/2006/main" xmlns:r="http://schemas.openxmlformats.org/officeDocument/2006/relationships">
   <p:cSld>
+    <p:bg>
+      <p:bgPr>
+        <a:solidFill>
+          <a:srgbClr val="EAFDF7"/>
+        </a:solidFill>
+        <a:effectLst/>
+      </p:bgPr>
+    </p:bg>
     <p:spTree>
       <p:nvGrpSpPr>
         <p:cNvPr id="1" name=""/>
@@ -3293,30 +3301,116 @@
         <p:nvPr/>
       </p:nvGrpSpPr>
       <p:grpSpPr/>
-      <p:pic>
-        <p:nvPicPr>
-          <p:cNvPr id="3" name="표지 그림" descr="family-19.jpg"/>
-          <p:cNvPicPr>
-            <a:picLocks noChangeAspect="1"/>
-          </p:cNvPicPr>
-          <p:nvPr/>
-        </p:nvPicPr>
-        <p:blipFill>
-          <a:blip r:embed="rId2"/>
-          <a:stretch>
-            <a:fillRect/>
-          </a:stretch>
-        </p:blipFill>
-        <p:spPr>
-          <a:xfrm>
-            <a:off x="0" y="0"/>
-            <a:ext cx="12191695" cy="6858000"/>
+      <p:sp>
+        <p:nvSpPr>
+          <p:cNvPr id="3" name="사진 자리"/>
+          <p:cNvSpPr/>
+          <p:nvPr/>
+        </p:nvSpPr>
+        <p:spPr>
+          <a:xfrm>
+            <a:off x="7802684" y="0"/>
+            <a:ext cx="4389010" cy="6858000"/>
           </a:xfrm>
           <a:prstGeom prst="rect">
             <a:avLst/>
           </a:prstGeom>
-        </p:spPr>
-      </p:pic>
+          <a:solidFill>
+            <a:srgbClr val="A5F3D9"/>
+          </a:solidFill>
+          <a:ln>
+            <a:noFill/>
+          </a:ln>
+        </p:spPr>
+        <p:txBody>
+          <a:bodyPr rtlCol="0" anchor="ctr" wrap="square" lIns="54864" rIns="54864" tIns="27432" bIns="27432">
+            <a:noAutofit/>
+          </a:bodyPr>
+          <a:lstStyle/>
+          <a:p>
+            <a:pPr algn="ctr">
+              <a:lnSpc>
+                <a:spcPct val="100000"/>
+              </a:lnSpc>
+            </a:pPr>
+            <a:r>
+              <a:rPr sz="1400" b="0" i="0">
+                <a:solidFill>
+                  <a:srgbClr val="27493E"/>
+                </a:solidFill>
+              </a:rPr>
+              <a:t>사진을 넣어 주세요</a:t>
+            </a:r>
+          </a:p>
+        </p:txBody>
+      </p:sp>
+      <p:sp>
+        <p:nvSpPr>
+          <p:cNvPr id="4" name="장식"/>
+          <p:cNvSpPr/>
+          <p:nvPr/>
+        </p:nvSpPr>
+        <p:spPr>
+          <a:xfrm>
+            <a:off x="8168435" y="365760"/>
+            <a:ext cx="3657508" cy="6126480"/>
+          </a:xfrm>
+          <a:prstGeom prst="rect">
+            <a:avLst/>
+          </a:prstGeom>
+          <a:noFill/>
+          <a:ln w="9525">
+            <a:solidFill>
+              <a:srgbClr val="26231F"/>
+            </a:solidFill>
+          </a:ln>
+        </p:spPr>
+        <p:txBody>
+          <a:bodyPr rtlCol="0" anchor="ctr"/>
+          <a:lstStyle/>
+          <a:p>
+            <a:pPr algn="ctr"/>
+          </a:p>
+        </p:txBody>
+      </p:sp>
+      <p:sp>
+        <p:nvSpPr>
+          <p:cNvPr id="5" name="라벨"/>
+          <p:cNvSpPr txBox="1"/>
+          <p:nvPr/>
+        </p:nvSpPr>
+        <p:spPr>
+          <a:xfrm>
+            <a:off x="822960" y="2148840"/>
+            <a:ext cx="5608179" cy="274320"/>
+          </a:xfrm>
+          <a:prstGeom prst="rect">
+            <a:avLst/>
+          </a:prstGeom>
+          <a:noFill/>
+        </p:spPr>
+        <p:txBody>
+          <a:bodyPr wrap="square" lIns="54864" rIns="54864" tIns="27432" bIns="27432" anchor="t">
+            <a:noAutofit/>
+          </a:bodyPr>
+          <a:lstStyle/>
+          <a:p>
+            <a:pPr algn="l">
+              <a:lnSpc>
+                <a:spcPct val="115000"/>
+              </a:lnSpc>
+            </a:pPr>
+            <a:r>
+              <a:rPr sz="1000" b="1" i="0" spc="250">
+                <a:solidFill>
+                  <a:srgbClr val="26231F"/>
+                </a:solidFill>
+              </a:rPr>
+              <a:t>FAMILY ALBUM</a:t>
+            </a:r>
+          </a:p>
+        </p:txBody>
+      </p:sp>
       <p:sp>
         <p:nvSpPr>
           <p:cNvPr id="2" name="Title 1"/>
@@ -3329,8 +3423,8 @@
         </p:nvSpPr>
         <p:spPr>
           <a:xfrm>
-            <a:off x="853418" y="2057400"/>
-            <a:ext cx="6095847" cy="1554480"/>
+            <a:off x="822960" y="2606040"/>
+            <a:ext cx="5608179" cy="1188720"/>
           </a:xfrm>
         </p:spPr>
         <p:txBody>
@@ -3345,9 +3439,9 @@
               </a:lnSpc>
             </a:pPr>
             <a:r>
-              <a:rPr sz="3600" b="1" i="0">
-                <a:solidFill>
-                  <a:srgbClr val="115F45"/>
+              <a:rPr sz="4000" b="1" i="0">
+                <a:solidFill>
+                  <a:srgbClr val="26231F"/>
                 </a:solidFill>
               </a:rPr>
               <a:t>우리 가족을 소개합니다</a:t>
@@ -3357,14 +3451,14 @@
       </p:sp>
       <p:sp>
         <p:nvSpPr>
-          <p:cNvPr id="4" name="한 줄 문구"/>
+          <p:cNvPr id="6" name="한 줄 문구"/>
           <p:cNvSpPr txBox="1"/>
           <p:nvPr/>
         </p:nvSpPr>
         <p:spPr>
           <a:xfrm>
-            <a:off x="853418" y="3749039"/>
-            <a:ext cx="6095847" cy="822960"/>
+            <a:off x="822960" y="3886200"/>
+            <a:ext cx="5608179" cy="822960"/>
           </a:xfrm>
           <a:prstGeom prst="rect">
             <a:avLst/>
@@ -3383,9 +3477,9 @@
               </a:lnSpc>
             </a:pPr>
             <a:r>
-              <a:rPr sz="1700" b="0" i="1">
-                <a:solidFill>
-                  <a:srgbClr val="115F45"/>
+              <a:rPr sz="1700" b="0" i="0">
+                <a:solidFill>
+                  <a:srgbClr val="26231F"/>
                 </a:solidFill>
               </a:rPr>
               <a:t>혼자 찾아간 반딧불 마을</a:t>
@@ -3395,14 +3489,14 @@
       </p:sp>
       <p:sp>
         <p:nvSpPr>
-          <p:cNvPr id="5" name="안내 문구"/>
+          <p:cNvPr id="7" name="안내 문구"/>
           <p:cNvSpPr txBox="1"/>
           <p:nvPr/>
         </p:nvSpPr>
         <p:spPr>
           <a:xfrm>
-            <a:off x="853418" y="4617720"/>
-            <a:ext cx="6095847" cy="914400"/>
+            <a:off x="822960" y="4754880"/>
+            <a:ext cx="5608179" cy="914400"/>
           </a:xfrm>
           <a:prstGeom prst="rect">
             <a:avLst/>
@@ -3423,10 +3517,10 @@
             <a:r>
               <a:rPr sz="1400" b="0" i="0">
                 <a:solidFill>
-                  <a:srgbClr val="666666"/>
+                  <a:srgbClr val="26231F"/>
                 </a:solidFill>
               </a:rPr>
-              <a:t>나 혼자 · 1인 가구 · 2027. 00. 00</a:t>
+              <a:t>나 혼자 · 1인 가구 · 날짜 입력</a:t>
             </a:r>
           </a:p>
         </p:txBody>
@@ -3445,7 +3539,7 @@
     <p:bg>
       <p:bgPr>
         <a:solidFill>
-          <a:srgbClr val="FFFFFF"/>
+          <a:srgbClr val="EAFDF7"/>
         </a:solidFill>
         <a:effectLst/>
       </p:bgPr>
@@ -3465,14 +3559,14 @@
         </p:nvSpPr>
         <p:spPr>
           <a:xfrm>
-            <a:off x="9905695" y="-1463040"/>
-            <a:ext cx="3840480" cy="3840480"/>
-          </a:xfrm>
-          <a:prstGeom prst="ellipse">
+            <a:off x="640080" y="566928"/>
+            <a:ext cx="10911535" cy="10972"/>
+          </a:xfrm>
+          <a:prstGeom prst="rect">
             <a:avLst/>
           </a:prstGeom>
           <a:solidFill>
-            <a:srgbClr val="D1FAEC"/>
+            <a:srgbClr val="26231F"/>
           </a:solidFill>
           <a:ln>
             <a:noFill/>
@@ -3488,20 +3582,58 @@
       </p:sp>
       <p:sp>
         <p:nvSpPr>
-          <p:cNvPr id="4" name="장식"/>
+          <p:cNvPr id="4" name="상단 라벨"/>
+          <p:cNvSpPr txBox="1"/>
+          <p:nvPr/>
+        </p:nvSpPr>
+        <p:spPr>
+          <a:xfrm>
+            <a:off x="640080" y="237744"/>
+            <a:ext cx="5486400" cy="274320"/>
+          </a:xfrm>
+          <a:prstGeom prst="rect">
+            <a:avLst/>
+          </a:prstGeom>
+          <a:noFill/>
+        </p:spPr>
+        <p:txBody>
+          <a:bodyPr wrap="square" lIns="54864" rIns="54864" tIns="27432" bIns="27432" anchor="ctr">
+            <a:noAutofit/>
+          </a:bodyPr>
+          <a:lstStyle/>
+          <a:p>
+            <a:pPr algn="l">
+              <a:lnSpc>
+                <a:spcPct val="115000"/>
+              </a:lnSpc>
+            </a:pPr>
+            <a:r>
+              <a:rPr sz="900" b="1" i="0" spc="250">
+                <a:solidFill>
+                  <a:srgbClr val="26231F"/>
+                </a:solidFill>
+              </a:rPr>
+              <a:t>FAMILY ALBUM</a:t>
+            </a:r>
+          </a:p>
+        </p:txBody>
+      </p:sp>
+      <p:sp>
+        <p:nvSpPr>
+          <p:cNvPr id="5" name="포인트"/>
           <p:cNvSpPr/>
           <p:nvPr/>
         </p:nvSpPr>
         <p:spPr>
           <a:xfrm>
-            <a:off x="11094415" y="274320"/>
-            <a:ext cx="411480" cy="411480"/>
-          </a:xfrm>
-          <a:prstGeom prst="ellipse">
+            <a:off x="11204143" y="246888"/>
+            <a:ext cx="237744" cy="237744"/>
+          </a:xfrm>
+          <a:prstGeom prst="star4">
             <a:avLst/>
           </a:prstGeom>
           <a:solidFill>
-            <a:srgbClr val="26C590"/>
+            <a:srgbClr val="7BEAC5"/>
           </a:solidFill>
           <a:ln>
             <a:noFill/>
@@ -3527,8 +3659,8 @@
         </p:nvSpPr>
         <p:spPr>
           <a:xfrm>
-            <a:off x="640080" y="457200"/>
-            <a:ext cx="9722815" cy="868680"/>
+            <a:off x="640080" y="731520"/>
+            <a:ext cx="10911535" cy="822960"/>
           </a:xfrm>
         </p:spPr>
         <p:txBody>
@@ -3545,7 +3677,7 @@
             <a:r>
               <a:rPr sz="3000" b="1" i="0">
                 <a:solidFill>
-                  <a:srgbClr val="115F45"/>
+                  <a:srgbClr val="26231F"/>
                 </a:solidFill>
               </a:rPr>
               <a:t>가족 구성원</a:t>
@@ -3555,14 +3687,14 @@
       </p:sp>
       <p:sp>
         <p:nvSpPr>
-          <p:cNvPr id="5" name="사진 자리"/>
+          <p:cNvPr id="6" name="사진 자리"/>
           <p:cNvSpPr/>
           <p:nvPr/>
         </p:nvSpPr>
         <p:spPr>
           <a:xfrm>
-            <a:off x="1182319" y="1600200"/>
-            <a:ext cx="2400300" cy="2400300"/>
+            <a:off x="1239469" y="1783080"/>
+            <a:ext cx="2286000" cy="2286000"/>
           </a:xfrm>
           <a:prstGeom prst="ellipse">
             <a:avLst/>
@@ -3571,9 +3703,7 @@
             <a:srgbClr val="D1FAEC"/>
           </a:solidFill>
           <a:ln w="19050">
-            <a:solidFill>
-              <a:srgbClr val="26C590"/>
-            </a:solidFill>
+            <a:noFill/>
             <a:prstDash val="dash"/>
           </a:ln>
         </p:spPr>
@@ -3591,7 +3721,7 @@
             <a:r>
               <a:rPr sz="1200" b="0" i="0">
                 <a:solidFill>
-                  <a:srgbClr val="115F45"/>
+                  <a:srgbClr val="8E8780"/>
                 </a:solidFill>
               </a:rPr>
               <a:t>사진</a:t>
@@ -3601,13 +3731,13 @@
       </p:sp>
       <p:sp>
         <p:nvSpPr>
-          <p:cNvPr id="6" name="TextBox 5"/>
+          <p:cNvPr id="7" name="TextBox 6"/>
           <p:cNvSpPr txBox="1"/>
           <p:nvPr/>
         </p:nvSpPr>
         <p:spPr>
           <a:xfrm>
-            <a:off x="640080" y="4091939"/>
+            <a:off x="640080" y="4160520"/>
             <a:ext cx="3484778" cy="411480"/>
           </a:xfrm>
           <a:prstGeom prst="rect">
@@ -3629,7 +3759,7 @@
             <a:r>
               <a:rPr sz="1600" b="1" i="0">
                 <a:solidFill>
-                  <a:srgbClr val="115F45"/>
+                  <a:srgbClr val="27493E"/>
                 </a:solidFill>
               </a:rPr>
               <a:t>나</a:t>
@@ -3639,14 +3769,14 @@
       </p:sp>
       <p:sp>
         <p:nvSpPr>
-          <p:cNvPr id="7" name="TextBox 6"/>
+          <p:cNvPr id="8" name="TextBox 7"/>
           <p:cNvSpPr txBox="1"/>
           <p:nvPr/>
         </p:nvSpPr>
         <p:spPr>
           <a:xfrm>
-            <a:off x="731519" y="4549140"/>
-            <a:ext cx="3301898" cy="1851660"/>
+            <a:off x="731519" y="4617720"/>
+            <a:ext cx="3301898" cy="1737360"/>
           </a:xfrm>
           <a:prstGeom prst="rect">
             <a:avLst/>
@@ -3707,14 +3837,14 @@
       </p:sp>
       <p:sp>
         <p:nvSpPr>
-          <p:cNvPr id="8" name="사진 자리"/>
+          <p:cNvPr id="9" name="사진 자리"/>
           <p:cNvSpPr/>
           <p:nvPr/>
         </p:nvSpPr>
         <p:spPr>
           <a:xfrm>
-            <a:off x="4895697" y="1600200"/>
-            <a:ext cx="2400300" cy="2400300"/>
+            <a:off x="4952847" y="1783080"/>
+            <a:ext cx="2286000" cy="2286000"/>
           </a:xfrm>
           <a:prstGeom prst="ellipse">
             <a:avLst/>
@@ -3723,9 +3853,7 @@
             <a:srgbClr val="D1FAEC"/>
           </a:solidFill>
           <a:ln w="19050">
-            <a:solidFill>
-              <a:srgbClr val="26C590"/>
-            </a:solidFill>
+            <a:noFill/>
             <a:prstDash val="dash"/>
           </a:ln>
         </p:spPr>
@@ -3743,7 +3871,7 @@
             <a:r>
               <a:rPr sz="1200" b="0" i="0">
                 <a:solidFill>
-                  <a:srgbClr val="115F45"/>
+                  <a:srgbClr val="8E8780"/>
                 </a:solidFill>
               </a:rPr>
               <a:t>사진</a:t>
@@ -3753,13 +3881,13 @@
       </p:sp>
       <p:sp>
         <p:nvSpPr>
-          <p:cNvPr id="9" name="TextBox 8"/>
+          <p:cNvPr id="10" name="TextBox 9"/>
           <p:cNvSpPr txBox="1"/>
           <p:nvPr/>
         </p:nvSpPr>
         <p:spPr>
           <a:xfrm>
-            <a:off x="4353458" y="4091939"/>
+            <a:off x="4353458" y="4160520"/>
             <a:ext cx="3484778" cy="411480"/>
           </a:xfrm>
           <a:prstGeom prst="rect">
@@ -3781,7 +3909,7 @@
             <a:r>
               <a:rPr sz="1600" b="1" i="0">
                 <a:solidFill>
-                  <a:srgbClr val="115F45"/>
+                  <a:srgbClr val="27493E"/>
                 </a:solidFill>
               </a:rPr>
               <a:t>내 공간</a:t>
@@ -3791,14 +3919,14 @@
       </p:sp>
       <p:sp>
         <p:nvSpPr>
-          <p:cNvPr id="10" name="TextBox 9"/>
+          <p:cNvPr id="11" name="TextBox 10"/>
           <p:cNvSpPr txBox="1"/>
           <p:nvPr/>
         </p:nvSpPr>
         <p:spPr>
           <a:xfrm>
-            <a:off x="4444898" y="4549140"/>
-            <a:ext cx="3301898" cy="1851660"/>
+            <a:off x="4444898" y="4617720"/>
+            <a:ext cx="3301898" cy="1737360"/>
           </a:xfrm>
           <a:prstGeom prst="rect">
             <a:avLst/>
@@ -3859,14 +3987,14 @@
       </p:sp>
       <p:sp>
         <p:nvSpPr>
-          <p:cNvPr id="11" name="사진 자리"/>
+          <p:cNvPr id="12" name="사진 자리"/>
           <p:cNvSpPr/>
           <p:nvPr/>
         </p:nvSpPr>
         <p:spPr>
           <a:xfrm>
-            <a:off x="8609076" y="1600200"/>
-            <a:ext cx="2400300" cy="2400300"/>
+            <a:off x="8666226" y="1783080"/>
+            <a:ext cx="2286000" cy="2286000"/>
           </a:xfrm>
           <a:prstGeom prst="ellipse">
             <a:avLst/>
@@ -3875,9 +4003,7 @@
             <a:srgbClr val="D1FAEC"/>
           </a:solidFill>
           <a:ln w="19050">
-            <a:solidFill>
-              <a:srgbClr val="26C590"/>
-            </a:solidFill>
+            <a:noFill/>
             <a:prstDash val="dash"/>
           </a:ln>
         </p:spPr>
@@ -3895,7 +4021,7 @@
             <a:r>
               <a:rPr sz="1200" b="0" i="0">
                 <a:solidFill>
-                  <a:srgbClr val="115F45"/>
+                  <a:srgbClr val="8E8780"/>
                 </a:solidFill>
               </a:rPr>
               <a:t>사진</a:t>
@@ -3905,13 +4031,13 @@
       </p:sp>
       <p:sp>
         <p:nvSpPr>
-          <p:cNvPr id="12" name="TextBox 11"/>
+          <p:cNvPr id="13" name="TextBox 12"/>
           <p:cNvSpPr txBox="1"/>
           <p:nvPr/>
         </p:nvSpPr>
         <p:spPr>
           <a:xfrm>
-            <a:off x="8066836" y="4091939"/>
+            <a:off x="8066836" y="4160520"/>
             <a:ext cx="3484778" cy="411480"/>
           </a:xfrm>
           <a:prstGeom prst="rect">
@@ -3933,7 +4059,7 @@
             <a:r>
               <a:rPr sz="1600" b="1" i="0">
                 <a:solidFill>
-                  <a:srgbClr val="115F45"/>
+                  <a:srgbClr val="27493E"/>
                 </a:solidFill>
               </a:rPr>
               <a:t>내 하루</a:t>
@@ -3943,14 +4069,14 @@
       </p:sp>
       <p:sp>
         <p:nvSpPr>
-          <p:cNvPr id="13" name="TextBox 12"/>
+          <p:cNvPr id="14" name="TextBox 13"/>
           <p:cNvSpPr txBox="1"/>
           <p:nvPr/>
         </p:nvSpPr>
         <p:spPr>
           <a:xfrm>
-            <a:off x="8158276" y="4549140"/>
-            <a:ext cx="3301898" cy="1851660"/>
+            <a:off x="8158276" y="4617720"/>
+            <a:ext cx="3301898" cy="1737360"/>
           </a:xfrm>
           <a:prstGeom prst="rect">
             <a:avLst/>
@@ -4023,7 +4149,7 @@
     <p:bg>
       <p:bgPr>
         <a:solidFill>
-          <a:srgbClr val="FFFFFF"/>
+          <a:srgbClr val="EAFDF7"/>
         </a:solidFill>
         <a:effectLst/>
       </p:bgPr>
@@ -4043,10 +4169,144 @@
         </p:nvSpPr>
         <p:spPr>
           <a:xfrm>
-            <a:off x="9905695" y="-1463040"/>
-            <a:ext cx="3840480" cy="3840480"/>
-          </a:xfrm>
-          <a:prstGeom prst="ellipse">
+            <a:off x="640080" y="566928"/>
+            <a:ext cx="10911535" cy="10972"/>
+          </a:xfrm>
+          <a:prstGeom prst="rect">
+            <a:avLst/>
+          </a:prstGeom>
+          <a:solidFill>
+            <a:srgbClr val="26231F"/>
+          </a:solidFill>
+          <a:ln>
+            <a:noFill/>
+          </a:ln>
+        </p:spPr>
+        <p:txBody>
+          <a:bodyPr rtlCol="0" anchor="ctr"/>
+          <a:lstStyle/>
+          <a:p>
+            <a:pPr algn="ctr"/>
+          </a:p>
+        </p:txBody>
+      </p:sp>
+      <p:sp>
+        <p:nvSpPr>
+          <p:cNvPr id="4" name="상단 라벨"/>
+          <p:cNvSpPr txBox="1"/>
+          <p:nvPr/>
+        </p:nvSpPr>
+        <p:spPr>
+          <a:xfrm>
+            <a:off x="640080" y="237744"/>
+            <a:ext cx="5486400" cy="274320"/>
+          </a:xfrm>
+          <a:prstGeom prst="rect">
+            <a:avLst/>
+          </a:prstGeom>
+          <a:noFill/>
+        </p:spPr>
+        <p:txBody>
+          <a:bodyPr wrap="square" lIns="54864" rIns="54864" tIns="27432" bIns="27432" anchor="ctr">
+            <a:noAutofit/>
+          </a:bodyPr>
+          <a:lstStyle/>
+          <a:p>
+            <a:pPr algn="l">
+              <a:lnSpc>
+                <a:spcPct val="115000"/>
+              </a:lnSpc>
+            </a:pPr>
+            <a:r>
+              <a:rPr sz="900" b="1" i="0" spc="250">
+                <a:solidFill>
+                  <a:srgbClr val="26231F"/>
+                </a:solidFill>
+              </a:rPr>
+              <a:t>FAMILY ALBUM</a:t>
+            </a:r>
+          </a:p>
+        </p:txBody>
+      </p:sp>
+      <p:sp>
+        <p:nvSpPr>
+          <p:cNvPr id="5" name="포인트"/>
+          <p:cNvSpPr/>
+          <p:nvPr/>
+        </p:nvSpPr>
+        <p:spPr>
+          <a:xfrm>
+            <a:off x="11204143" y="246888"/>
+            <a:ext cx="237744" cy="237744"/>
+          </a:xfrm>
+          <a:prstGeom prst="star4">
+            <a:avLst/>
+          </a:prstGeom>
+          <a:solidFill>
+            <a:srgbClr val="7BEAC5"/>
+          </a:solidFill>
+          <a:ln>
+            <a:noFill/>
+          </a:ln>
+        </p:spPr>
+        <p:txBody>
+          <a:bodyPr rtlCol="0" anchor="ctr"/>
+          <a:lstStyle/>
+          <a:p>
+            <a:pPr algn="ctr"/>
+          </a:p>
+        </p:txBody>
+      </p:sp>
+      <p:sp>
+        <p:nvSpPr>
+          <p:cNvPr id="2" name="Title 1"/>
+          <p:cNvSpPr>
+            <a:spLocks noGrp="1"/>
+          </p:cNvSpPr>
+          <p:nvPr>
+            <p:ph type="title"/>
+          </p:nvPr>
+        </p:nvSpPr>
+        <p:spPr>
+          <a:xfrm>
+            <a:off x="640080" y="731520"/>
+            <a:ext cx="10911535" cy="822960"/>
+          </a:xfrm>
+        </p:spPr>
+        <p:txBody>
+          <a:bodyPr wrap="square" lIns="54864" rIns="54864" tIns="27432" bIns="27432" anchor="ctr">
+            <a:noAutofit/>
+          </a:bodyPr>
+          <a:lstStyle/>
+          <a:p>
+            <a:pPr algn="l">
+              <a:lnSpc>
+                <a:spcPct val="105000"/>
+              </a:lnSpc>
+            </a:pPr>
+            <a:r>
+              <a:rPr sz="3000" b="1" i="0">
+                <a:solidFill>
+                  <a:srgbClr val="26231F"/>
+                </a:solidFill>
+              </a:rPr>
+              <a:t>우리 가족 이야기</a:t>
+            </a:r>
+          </a:p>
+        </p:txBody>
+      </p:sp>
+      <p:sp>
+        <p:nvSpPr>
+          <p:cNvPr id="6" name="타임라인 선"/>
+          <p:cNvSpPr/>
+          <p:nvPr/>
+        </p:nvSpPr>
+        <p:spPr>
+          <a:xfrm>
+            <a:off x="640080" y="3520440"/>
+            <a:ext cx="10911535" cy="54864"/>
+          </a:xfrm>
+          <a:prstGeom prst="rect">
             <a:avLst/>
           </a:prstGeom>
           <a:solidFill>
@@ -4066,116 +4326,20 @@
       </p:sp>
       <p:sp>
         <p:nvSpPr>
-          <p:cNvPr id="4" name="장식"/>
+          <p:cNvPr id="7" name="때 1"/>
           <p:cNvSpPr/>
           <p:nvPr/>
         </p:nvSpPr>
         <p:spPr>
           <a:xfrm>
-            <a:off x="11094415" y="274320"/>
-            <a:ext cx="411480" cy="411480"/>
+            <a:off x="1802853" y="3337560"/>
+            <a:ext cx="402336" cy="402336"/>
           </a:xfrm>
           <a:prstGeom prst="ellipse">
             <a:avLst/>
           </a:prstGeom>
           <a:solidFill>
-            <a:srgbClr val="26C590"/>
-          </a:solidFill>
-          <a:ln>
-            <a:noFill/>
-          </a:ln>
-        </p:spPr>
-        <p:txBody>
-          <a:bodyPr rtlCol="0" anchor="ctr"/>
-          <a:lstStyle/>
-          <a:p>
-            <a:pPr algn="ctr"/>
-          </a:p>
-        </p:txBody>
-      </p:sp>
-      <p:sp>
-        <p:nvSpPr>
-          <p:cNvPr id="2" name="Title 1"/>
-          <p:cNvSpPr>
-            <a:spLocks noGrp="1"/>
-          </p:cNvSpPr>
-          <p:nvPr>
-            <p:ph type="title"/>
-          </p:nvPr>
-        </p:nvSpPr>
-        <p:spPr>
-          <a:xfrm>
-            <a:off x="640080" y="457200"/>
-            <a:ext cx="9722815" cy="868680"/>
-          </a:xfrm>
-        </p:spPr>
-        <p:txBody>
-          <a:bodyPr wrap="square" lIns="54864" rIns="54864" tIns="27432" bIns="27432" anchor="ctr">
-            <a:noAutofit/>
-          </a:bodyPr>
-          <a:lstStyle/>
-          <a:p>
-            <a:pPr algn="l">
-              <a:lnSpc>
-                <a:spcPct val="105000"/>
-              </a:lnSpc>
-            </a:pPr>
-            <a:r>
-              <a:rPr sz="3000" b="1" i="0">
-                <a:solidFill>
-                  <a:srgbClr val="115F45"/>
-                </a:solidFill>
-              </a:rPr>
-              <a:t>우리 가족 이야기</a:t>
-            </a:r>
-          </a:p>
-        </p:txBody>
-      </p:sp>
-      <p:sp>
-        <p:nvSpPr>
-          <p:cNvPr id="5" name="타임라인 선"/>
-          <p:cNvSpPr/>
-          <p:nvPr/>
-        </p:nvSpPr>
-        <p:spPr>
-          <a:xfrm>
-            <a:off x="640080" y="3337560"/>
-            <a:ext cx="10911535" cy="54864"/>
-          </a:xfrm>
-          <a:prstGeom prst="rect">
-            <a:avLst/>
-          </a:prstGeom>
-          <a:solidFill>
-            <a:srgbClr val="D1FAEC"/>
-          </a:solidFill>
-          <a:ln>
-            <a:noFill/>
-          </a:ln>
-        </p:spPr>
-        <p:txBody>
-          <a:bodyPr rtlCol="0" anchor="ctr"/>
-          <a:lstStyle/>
-          <a:p>
-            <a:pPr algn="ctr"/>
-          </a:p>
-        </p:txBody>
-      </p:sp>
-      <p:sp>
-        <p:nvSpPr>
-          <p:cNvPr id="6" name="때 1"/>
-          <p:cNvSpPr/>
-          <p:nvPr/>
-        </p:nvSpPr>
-        <p:spPr>
-          <a:xfrm>
-            <a:off x="1802853" y="3154680"/>
-            <a:ext cx="402336" cy="402336"/>
-          </a:xfrm>
-          <a:prstGeom prst="ellipse">
-            <a:avLst/>
-          </a:prstGeom>
-          <a:solidFill>
-            <a:srgbClr val="26C590"/>
+            <a:srgbClr val="7BEAC5"/>
           </a:solidFill>
           <a:ln w="38100">
             <a:solidFill>
@@ -4193,13 +4357,13 @@
       </p:sp>
       <p:sp>
         <p:nvSpPr>
-          <p:cNvPr id="7" name="TextBox 6"/>
+          <p:cNvPr id="8" name="TextBox 7"/>
           <p:cNvSpPr txBox="1"/>
           <p:nvPr/>
         </p:nvSpPr>
         <p:spPr>
           <a:xfrm>
-            <a:off x="685800" y="2514600"/>
+            <a:off x="685800" y="2697480"/>
             <a:ext cx="2636443" cy="457200"/>
           </a:xfrm>
           <a:prstGeom prst="rect">
@@ -4221,7 +4385,7 @@
             <a:r>
               <a:rPr sz="1600" b="1" i="0">
                 <a:solidFill>
-                  <a:srgbClr val="26C590"/>
+                  <a:srgbClr val="7BEAC5"/>
                 </a:solidFill>
               </a:rPr>
               <a:t>태어난 곳</a:t>
@@ -4231,13 +4395,13 @@
       </p:sp>
       <p:sp>
         <p:nvSpPr>
-          <p:cNvPr id="8" name="TextBox 7"/>
+          <p:cNvPr id="9" name="TextBox 8"/>
           <p:cNvSpPr txBox="1"/>
           <p:nvPr/>
         </p:nvSpPr>
         <p:spPr>
           <a:xfrm>
-            <a:off x="731519" y="3703320"/>
+            <a:off x="731519" y="3886200"/>
             <a:ext cx="2545003" cy="457200"/>
           </a:xfrm>
           <a:prstGeom prst="rect">
@@ -4259,7 +4423,7 @@
             <a:r>
               <a:rPr sz="1800" b="1" i="0">
                 <a:solidFill>
-                  <a:srgbClr val="115F45"/>
+                  <a:srgbClr val="27493E"/>
                 </a:solidFill>
               </a:rPr>
               <a:t>나의 뿌리</a:t>
@@ -4269,13 +4433,13 @@
       </p:sp>
       <p:sp>
         <p:nvSpPr>
-          <p:cNvPr id="9" name="TextBox 8"/>
+          <p:cNvPr id="10" name="TextBox 9"/>
           <p:cNvSpPr txBox="1"/>
           <p:nvPr/>
         </p:nvSpPr>
         <p:spPr>
           <a:xfrm>
-            <a:off x="731519" y="4206240"/>
+            <a:off x="731519" y="4389120"/>
             <a:ext cx="2545003" cy="1645920"/>
           </a:xfrm>
           <a:prstGeom prst="rect">
@@ -4297,7 +4461,7 @@
             <a:r>
               <a:rPr sz="1500" b="0" i="0">
                 <a:solidFill>
-                  <a:srgbClr val="2B2B2B"/>
+                  <a:srgbClr val="26231F"/>
                 </a:solidFill>
               </a:rPr>
               <a:t>고향의 기억을 적어요</a:t>
@@ -4307,20 +4471,20 @@
       </p:sp>
       <p:sp>
         <p:nvSpPr>
-          <p:cNvPr id="10" name="때 2"/>
+          <p:cNvPr id="11" name="때 2"/>
           <p:cNvSpPr/>
           <p:nvPr/>
         </p:nvSpPr>
         <p:spPr>
           <a:xfrm>
-            <a:off x="4530737" y="3154680"/>
+            <a:off x="4530737" y="3337560"/>
             <a:ext cx="402336" cy="402336"/>
           </a:xfrm>
           <a:prstGeom prst="ellipse">
             <a:avLst/>
           </a:prstGeom>
           <a:solidFill>
-            <a:srgbClr val="26C590"/>
+            <a:srgbClr val="7BEAC5"/>
           </a:solidFill>
           <a:ln w="38100">
             <a:solidFill>
@@ -4338,13 +4502,13 @@
       </p:sp>
       <p:sp>
         <p:nvSpPr>
-          <p:cNvPr id="11" name="TextBox 10"/>
+          <p:cNvPr id="12" name="TextBox 11"/>
           <p:cNvSpPr txBox="1"/>
           <p:nvPr/>
         </p:nvSpPr>
         <p:spPr>
           <a:xfrm>
-            <a:off x="3413683" y="2514600"/>
+            <a:off x="3413683" y="2697480"/>
             <a:ext cx="2636443" cy="457200"/>
           </a:xfrm>
           <a:prstGeom prst="rect">
@@ -4366,7 +4530,7 @@
             <a:r>
               <a:rPr sz="1600" b="1" i="0">
                 <a:solidFill>
-                  <a:srgbClr val="26C590"/>
+                  <a:srgbClr val="7BEAC5"/>
                 </a:solidFill>
               </a:rPr>
               <a:t>학창 시절</a:t>
@@ -4376,13 +4540,13 @@
       </p:sp>
       <p:sp>
         <p:nvSpPr>
-          <p:cNvPr id="12" name="TextBox 11"/>
+          <p:cNvPr id="13" name="TextBox 12"/>
           <p:cNvSpPr txBox="1"/>
           <p:nvPr/>
         </p:nvSpPr>
         <p:spPr>
           <a:xfrm>
-            <a:off x="3459403" y="3703320"/>
+            <a:off x="3459403" y="3886200"/>
             <a:ext cx="2545003" cy="457200"/>
           </a:xfrm>
           <a:prstGeom prst="rect">
@@ -4404,7 +4568,7 @@
             <a:r>
               <a:rPr sz="1800" b="1" i="0">
                 <a:solidFill>
-                  <a:srgbClr val="115F45"/>
+                  <a:srgbClr val="27493E"/>
                 </a:solidFill>
               </a:rPr>
               <a:t>자라던 시간</a:t>
@@ -4414,13 +4578,13 @@
       </p:sp>
       <p:sp>
         <p:nvSpPr>
-          <p:cNvPr id="13" name="TextBox 12"/>
+          <p:cNvPr id="14" name="TextBox 13"/>
           <p:cNvSpPr txBox="1"/>
           <p:nvPr/>
         </p:nvSpPr>
         <p:spPr>
           <a:xfrm>
-            <a:off x="3459403" y="4206240"/>
+            <a:off x="3459403" y="4389120"/>
             <a:ext cx="2545003" cy="1645920"/>
           </a:xfrm>
           <a:prstGeom prst="rect">
@@ -4442,7 +4606,7 @@
             <a:r>
               <a:rPr sz="1500" b="0" i="0">
                 <a:solidFill>
-                  <a:srgbClr val="2B2B2B"/>
+                  <a:srgbClr val="26231F"/>
                 </a:solidFill>
               </a:rPr>
               <a:t>가장 좋았던 기억</a:t>
@@ -4452,20 +4616,20 @@
       </p:sp>
       <p:sp>
         <p:nvSpPr>
-          <p:cNvPr id="14" name="때 3"/>
+          <p:cNvPr id="15" name="때 3"/>
           <p:cNvSpPr/>
           <p:nvPr/>
         </p:nvSpPr>
         <p:spPr>
           <a:xfrm>
-            <a:off x="7258621" y="3154680"/>
+            <a:off x="7258621" y="3337560"/>
             <a:ext cx="402336" cy="402336"/>
           </a:xfrm>
           <a:prstGeom prst="ellipse">
             <a:avLst/>
           </a:prstGeom>
           <a:solidFill>
-            <a:srgbClr val="26C590"/>
+            <a:srgbClr val="7BEAC5"/>
           </a:solidFill>
           <a:ln w="38100">
             <a:solidFill>
@@ -4483,13 +4647,13 @@
       </p:sp>
       <p:sp>
         <p:nvSpPr>
-          <p:cNvPr id="15" name="TextBox 14"/>
+          <p:cNvPr id="16" name="TextBox 15"/>
           <p:cNvSpPr txBox="1"/>
           <p:nvPr/>
         </p:nvSpPr>
         <p:spPr>
           <a:xfrm>
-            <a:off x="6141567" y="2514600"/>
+            <a:off x="6141567" y="2697480"/>
             <a:ext cx="2636443" cy="457200"/>
           </a:xfrm>
           <a:prstGeom prst="rect">
@@ -4511,7 +4675,7 @@
             <a:r>
               <a:rPr sz="1600" b="1" i="0">
                 <a:solidFill>
-                  <a:srgbClr val="26C590"/>
+                  <a:srgbClr val="7BEAC5"/>
                 </a:solidFill>
               </a:rPr>
               <a:t>혼자 시작한 날</a:t>
@@ -4521,13 +4685,13 @@
       </p:sp>
       <p:sp>
         <p:nvSpPr>
-          <p:cNvPr id="16" name="TextBox 15"/>
+          <p:cNvPr id="17" name="TextBox 16"/>
           <p:cNvSpPr txBox="1"/>
           <p:nvPr/>
         </p:nvSpPr>
         <p:spPr>
           <a:xfrm>
-            <a:off x="6187287" y="3703320"/>
+            <a:off x="6187287" y="3886200"/>
             <a:ext cx="2545003" cy="457200"/>
           </a:xfrm>
           <a:prstGeom prst="rect">
@@ -4549,7 +4713,7 @@
             <a:r>
               <a:rPr sz="1800" b="1" i="0">
                 <a:solidFill>
-                  <a:srgbClr val="115F45"/>
+                  <a:srgbClr val="27493E"/>
                 </a:solidFill>
               </a:rPr>
               <a:t>나의 첫 집</a:t>
@@ -4559,13 +4723,13 @@
       </p:sp>
       <p:sp>
         <p:nvSpPr>
-          <p:cNvPr id="17" name="TextBox 16"/>
+          <p:cNvPr id="18" name="TextBox 17"/>
           <p:cNvSpPr txBox="1"/>
           <p:nvPr/>
         </p:nvSpPr>
         <p:spPr>
           <a:xfrm>
-            <a:off x="6187287" y="4206240"/>
+            <a:off x="6187287" y="4389120"/>
             <a:ext cx="2545003" cy="1645920"/>
           </a:xfrm>
           <a:prstGeom prst="rect">
@@ -4587,7 +4751,7 @@
             <a:r>
               <a:rPr sz="1500" b="0" i="0">
                 <a:solidFill>
-                  <a:srgbClr val="2B2B2B"/>
+                  <a:srgbClr val="26231F"/>
                 </a:solidFill>
               </a:rPr>
               <a:t>독립하던 날</a:t>
@@ -4597,20 +4761,20 @@
       </p:sp>
       <p:sp>
         <p:nvSpPr>
-          <p:cNvPr id="18" name="때 4"/>
+          <p:cNvPr id="19" name="때 4"/>
           <p:cNvSpPr/>
           <p:nvPr/>
         </p:nvSpPr>
         <p:spPr>
           <a:xfrm>
-            <a:off x="9986505" y="3154680"/>
+            <a:off x="9986505" y="3337560"/>
             <a:ext cx="402336" cy="402336"/>
           </a:xfrm>
           <a:prstGeom prst="ellipse">
             <a:avLst/>
           </a:prstGeom>
           <a:solidFill>
-            <a:srgbClr val="26C590"/>
+            <a:srgbClr val="7BEAC5"/>
           </a:solidFill>
           <a:ln w="38100">
             <a:solidFill>
@@ -4628,13 +4792,13 @@
       </p:sp>
       <p:sp>
         <p:nvSpPr>
-          <p:cNvPr id="19" name="TextBox 18"/>
+          <p:cNvPr id="20" name="TextBox 19"/>
           <p:cNvSpPr txBox="1"/>
           <p:nvPr/>
         </p:nvSpPr>
         <p:spPr>
           <a:xfrm>
-            <a:off x="8869451" y="2514600"/>
+            <a:off x="8869451" y="2697480"/>
             <a:ext cx="2636443" cy="457200"/>
           </a:xfrm>
           <a:prstGeom prst="rect">
@@ -4656,7 +4820,7 @@
             <a:r>
               <a:rPr sz="1600" b="1" i="0">
                 <a:solidFill>
-                  <a:srgbClr val="26C590"/>
+                  <a:srgbClr val="7BEAC5"/>
                 </a:solidFill>
               </a:rPr>
               <a:t>지금</a:t>
@@ -4666,13 +4830,13 @@
       </p:sp>
       <p:sp>
         <p:nvSpPr>
-          <p:cNvPr id="20" name="TextBox 19"/>
+          <p:cNvPr id="21" name="TextBox 20"/>
           <p:cNvSpPr txBox="1"/>
           <p:nvPr/>
         </p:nvSpPr>
         <p:spPr>
           <a:xfrm>
-            <a:off x="8915171" y="3703320"/>
+            <a:off x="8915171" y="3886200"/>
             <a:ext cx="2545003" cy="457200"/>
           </a:xfrm>
           <a:prstGeom prst="rect">
@@ -4694,7 +4858,7 @@
             <a:r>
               <a:rPr sz="1800" b="1" i="0">
                 <a:solidFill>
-                  <a:srgbClr val="115F45"/>
+                  <a:srgbClr val="27493E"/>
                 </a:solidFill>
               </a:rPr>
               <a:t>오늘의 나</a:t>
@@ -4704,13 +4868,13 @@
       </p:sp>
       <p:sp>
         <p:nvSpPr>
-          <p:cNvPr id="21" name="TextBox 20"/>
+          <p:cNvPr id="22" name="TextBox 21"/>
           <p:cNvSpPr txBox="1"/>
           <p:nvPr/>
         </p:nvSpPr>
         <p:spPr>
           <a:xfrm>
-            <a:off x="8915171" y="4206240"/>
+            <a:off x="8915171" y="4389120"/>
             <a:ext cx="2545003" cy="1645920"/>
           </a:xfrm>
           <a:prstGeom prst="rect">
@@ -4732,7 +4896,7 @@
             <a:r>
               <a:rPr sz="1500" b="0" i="0">
                 <a:solidFill>
-                  <a:srgbClr val="2B2B2B"/>
+                  <a:srgbClr val="26231F"/>
                 </a:solidFill>
               </a:rPr>
               <a:t>요즘 내 이야기</a:t>
@@ -4754,7 +4918,7 @@
     <p:bg>
       <p:bgPr>
         <a:solidFill>
-          <a:srgbClr val="FFFFFF"/>
+          <a:srgbClr val="EAFDF7"/>
         </a:solidFill>
         <a:effectLst/>
       </p:bgPr>
@@ -4774,14 +4938,14 @@
         </p:nvSpPr>
         <p:spPr>
           <a:xfrm>
-            <a:off x="9905695" y="-1463040"/>
-            <a:ext cx="3840480" cy="3840480"/>
-          </a:xfrm>
-          <a:prstGeom prst="ellipse">
+            <a:off x="640080" y="566928"/>
+            <a:ext cx="10911535" cy="10972"/>
+          </a:xfrm>
+          <a:prstGeom prst="rect">
             <a:avLst/>
           </a:prstGeom>
           <a:solidFill>
-            <a:srgbClr val="D1FAEC"/>
+            <a:srgbClr val="26231F"/>
           </a:solidFill>
           <a:ln>
             <a:noFill/>
@@ -4797,20 +4961,58 @@
       </p:sp>
       <p:sp>
         <p:nvSpPr>
-          <p:cNvPr id="4" name="장식"/>
+          <p:cNvPr id="4" name="상단 라벨"/>
+          <p:cNvSpPr txBox="1"/>
+          <p:nvPr/>
+        </p:nvSpPr>
+        <p:spPr>
+          <a:xfrm>
+            <a:off x="640080" y="237744"/>
+            <a:ext cx="5486400" cy="274320"/>
+          </a:xfrm>
+          <a:prstGeom prst="rect">
+            <a:avLst/>
+          </a:prstGeom>
+          <a:noFill/>
+        </p:spPr>
+        <p:txBody>
+          <a:bodyPr wrap="square" lIns="54864" rIns="54864" tIns="27432" bIns="27432" anchor="ctr">
+            <a:noAutofit/>
+          </a:bodyPr>
+          <a:lstStyle/>
+          <a:p>
+            <a:pPr algn="l">
+              <a:lnSpc>
+                <a:spcPct val="115000"/>
+              </a:lnSpc>
+            </a:pPr>
+            <a:r>
+              <a:rPr sz="900" b="1" i="0" spc="250">
+                <a:solidFill>
+                  <a:srgbClr val="26231F"/>
+                </a:solidFill>
+              </a:rPr>
+              <a:t>FAMILY ALBUM</a:t>
+            </a:r>
+          </a:p>
+        </p:txBody>
+      </p:sp>
+      <p:sp>
+        <p:nvSpPr>
+          <p:cNvPr id="5" name="포인트"/>
           <p:cNvSpPr/>
           <p:nvPr/>
         </p:nvSpPr>
         <p:spPr>
           <a:xfrm>
-            <a:off x="11094415" y="274320"/>
-            <a:ext cx="411480" cy="411480"/>
-          </a:xfrm>
-          <a:prstGeom prst="ellipse">
+            <a:off x="11204143" y="246888"/>
+            <a:ext cx="237744" cy="237744"/>
+          </a:xfrm>
+          <a:prstGeom prst="star4">
             <a:avLst/>
           </a:prstGeom>
           <a:solidFill>
-            <a:srgbClr val="26C590"/>
+            <a:srgbClr val="7BEAC5"/>
           </a:solidFill>
           <a:ln>
             <a:noFill/>
@@ -4836,8 +5038,8 @@
         </p:nvSpPr>
         <p:spPr>
           <a:xfrm>
-            <a:off x="640080" y="457200"/>
-            <a:ext cx="9722815" cy="868680"/>
+            <a:off x="640080" y="731520"/>
+            <a:ext cx="10911535" cy="822960"/>
           </a:xfrm>
         </p:spPr>
         <p:txBody>
@@ -4854,7 +5056,7 @@
             <a:r>
               <a:rPr sz="3000" b="1" i="0">
                 <a:solidFill>
-                  <a:srgbClr val="115F45"/>
+                  <a:srgbClr val="26231F"/>
                 </a:solidFill>
               </a:rPr>
               <a:t>우리 가족의 약속</a:t>
@@ -4864,27 +5066,25 @@
       </p:sp>
       <p:sp>
         <p:nvSpPr>
-          <p:cNvPr id="5" name="줄 1"/>
+          <p:cNvPr id="6" name="줄 1"/>
           <p:cNvSpPr/>
           <p:nvPr/>
         </p:nvSpPr>
         <p:spPr>
           <a:xfrm>
-            <a:off x="640080" y="1600200"/>
+            <a:off x="640080" y="1783080"/>
             <a:ext cx="10911535" cy="1005840"/>
           </a:xfrm>
           <a:prstGeom prst="roundRect">
             <a:avLst>
-              <a:gd name="adj" fmla="val 8000"/>
+              <a:gd name="adj" fmla="val 4000"/>
             </a:avLst>
           </a:prstGeom>
           <a:solidFill>
-            <a:srgbClr val="EEFCF7"/>
+            <a:srgbClr val="EAFDF7"/>
           </a:solidFill>
-          <a:ln w="12700">
-            <a:solidFill>
-              <a:srgbClr val="D1FAEC"/>
-            </a:solidFill>
+          <a:ln>
+            <a:noFill/>
           </a:ln>
         </p:spPr>
         <p:txBody>
@@ -4897,20 +5097,49 @@
       </p:sp>
       <p:sp>
         <p:nvSpPr>
-          <p:cNvPr id="6" name="번호 1"/>
+          <p:cNvPr id="7" name="포인트 막대"/>
           <p:cNvSpPr/>
           <p:nvPr/>
         </p:nvSpPr>
         <p:spPr>
           <a:xfrm>
-            <a:off x="822959" y="1874519"/>
+            <a:off x="640080" y="1892807"/>
+            <a:ext cx="54864" cy="786384"/>
+          </a:xfrm>
+          <a:prstGeom prst="rect">
+            <a:avLst/>
+          </a:prstGeom>
+          <a:solidFill>
+            <a:srgbClr val="7BEAC5"/>
+          </a:solidFill>
+          <a:ln>
+            <a:noFill/>
+          </a:ln>
+        </p:spPr>
+        <p:txBody>
+          <a:bodyPr rtlCol="0" anchor="ctr"/>
+          <a:lstStyle/>
+          <a:p>
+            <a:pPr algn="ctr"/>
+          </a:p>
+        </p:txBody>
+      </p:sp>
+      <p:sp>
+        <p:nvSpPr>
+          <p:cNvPr id="8" name="번호 1"/>
+          <p:cNvSpPr/>
+          <p:nvPr/>
+        </p:nvSpPr>
+        <p:spPr>
+          <a:xfrm>
+            <a:off x="822959" y="2057400"/>
             <a:ext cx="457200" cy="457200"/>
           </a:xfrm>
           <a:prstGeom prst="ellipse">
             <a:avLst/>
           </a:prstGeom>
           <a:solidFill>
-            <a:srgbClr val="26C590"/>
+            <a:srgbClr val="7BEAC5"/>
           </a:solidFill>
           <a:ln>
             <a:noFill/>
@@ -4930,7 +5159,7 @@
             <a:r>
               <a:rPr sz="1600" b="1" i="0">
                 <a:solidFill>
-                  <a:srgbClr val="FFFFFF"/>
+                  <a:srgbClr val="26231F"/>
                 </a:solidFill>
               </a:rPr>
               <a:t>1</a:t>
@@ -4940,13 +5169,13 @@
       </p:sp>
       <p:sp>
         <p:nvSpPr>
-          <p:cNvPr id="7" name="TextBox 6"/>
+          <p:cNvPr id="9" name="TextBox 8"/>
           <p:cNvSpPr txBox="1"/>
           <p:nvPr/>
         </p:nvSpPr>
         <p:spPr>
           <a:xfrm>
-            <a:off x="1508760" y="1645920"/>
+            <a:off x="1508760" y="1828800"/>
             <a:ext cx="2743200" cy="914400"/>
           </a:xfrm>
           <a:prstGeom prst="rect">
@@ -4968,7 +5197,7 @@
             <a:r>
               <a:rPr sz="1800" b="1" i="0">
                 <a:solidFill>
-                  <a:srgbClr val="115F45"/>
+                  <a:srgbClr val="27493E"/>
                 </a:solidFill>
               </a:rPr>
               <a:t>약속 1</a:t>
@@ -4978,13 +5207,13 @@
       </p:sp>
       <p:sp>
         <p:nvSpPr>
-          <p:cNvPr id="8" name="TextBox 7"/>
+          <p:cNvPr id="10" name="TextBox 9"/>
           <p:cNvSpPr txBox="1"/>
           <p:nvPr/>
         </p:nvSpPr>
         <p:spPr>
           <a:xfrm>
-            <a:off x="4297680" y="1645920"/>
+            <a:off x="4297680" y="1828800"/>
             <a:ext cx="7071055" cy="914400"/>
           </a:xfrm>
           <a:prstGeom prst="rect">
@@ -5006,7 +5235,7 @@
             <a:r>
               <a:rPr sz="1700" b="0" i="0">
                 <a:solidFill>
-                  <a:srgbClr val="2B2B2B"/>
+                  <a:srgbClr val="26231F"/>
                 </a:solidFill>
               </a:rPr>
               <a:t>나를 위한 밥상 차리기</a:t>
@@ -5016,27 +5245,25 @@
       </p:sp>
       <p:sp>
         <p:nvSpPr>
-          <p:cNvPr id="9" name="줄 2"/>
+          <p:cNvPr id="11" name="줄 2"/>
           <p:cNvSpPr/>
           <p:nvPr/>
         </p:nvSpPr>
         <p:spPr>
           <a:xfrm>
-            <a:off x="640080" y="2743200"/>
+            <a:off x="640080" y="2926080"/>
             <a:ext cx="10911535" cy="1005840"/>
           </a:xfrm>
           <a:prstGeom prst="roundRect">
             <a:avLst>
-              <a:gd name="adj" fmla="val 8000"/>
+              <a:gd name="adj" fmla="val 4000"/>
             </a:avLst>
           </a:prstGeom>
           <a:solidFill>
-            <a:srgbClr val="EEFCF7"/>
+            <a:srgbClr val="EAFDF7"/>
           </a:solidFill>
-          <a:ln w="12700">
-            <a:solidFill>
-              <a:srgbClr val="D1FAEC"/>
-            </a:solidFill>
+          <a:ln>
+            <a:noFill/>
           </a:ln>
         </p:spPr>
         <p:txBody>
@@ -5049,20 +5276,49 @@
       </p:sp>
       <p:sp>
         <p:nvSpPr>
-          <p:cNvPr id="10" name="번호 2"/>
+          <p:cNvPr id="12" name="포인트 막대"/>
           <p:cNvSpPr/>
           <p:nvPr/>
         </p:nvSpPr>
         <p:spPr>
           <a:xfrm>
-            <a:off x="822959" y="3017520"/>
+            <a:off x="640080" y="3035808"/>
+            <a:ext cx="54864" cy="786384"/>
+          </a:xfrm>
+          <a:prstGeom prst="rect">
+            <a:avLst/>
+          </a:prstGeom>
+          <a:solidFill>
+            <a:srgbClr val="7BEAC5"/>
+          </a:solidFill>
+          <a:ln>
+            <a:noFill/>
+          </a:ln>
+        </p:spPr>
+        <p:txBody>
+          <a:bodyPr rtlCol="0" anchor="ctr"/>
+          <a:lstStyle/>
+          <a:p>
+            <a:pPr algn="ctr"/>
+          </a:p>
+        </p:txBody>
+      </p:sp>
+      <p:sp>
+        <p:nvSpPr>
+          <p:cNvPr id="13" name="번호 2"/>
+          <p:cNvSpPr/>
+          <p:nvPr/>
+        </p:nvSpPr>
+        <p:spPr>
+          <a:xfrm>
+            <a:off x="822959" y="3200400"/>
             <a:ext cx="457200" cy="457200"/>
           </a:xfrm>
           <a:prstGeom prst="ellipse">
             <a:avLst/>
           </a:prstGeom>
           <a:solidFill>
-            <a:srgbClr val="26C590"/>
+            <a:srgbClr val="7BEAC5"/>
           </a:solidFill>
           <a:ln>
             <a:noFill/>
@@ -5082,7 +5338,7 @@
             <a:r>
               <a:rPr sz="1600" b="1" i="0">
                 <a:solidFill>
-                  <a:srgbClr val="FFFFFF"/>
+                  <a:srgbClr val="26231F"/>
                 </a:solidFill>
               </a:rPr>
               <a:t>2</a:t>
@@ -5092,13 +5348,13 @@
       </p:sp>
       <p:sp>
         <p:nvSpPr>
-          <p:cNvPr id="11" name="TextBox 10"/>
+          <p:cNvPr id="14" name="TextBox 13"/>
           <p:cNvSpPr txBox="1"/>
           <p:nvPr/>
         </p:nvSpPr>
         <p:spPr>
           <a:xfrm>
-            <a:off x="1508760" y="2788920"/>
+            <a:off x="1508760" y="2971800"/>
             <a:ext cx="2743200" cy="914400"/>
           </a:xfrm>
           <a:prstGeom prst="rect">
@@ -5120,7 +5376,7 @@
             <a:r>
               <a:rPr sz="1800" b="1" i="0">
                 <a:solidFill>
-                  <a:srgbClr val="115F45"/>
+                  <a:srgbClr val="27493E"/>
                 </a:solidFill>
               </a:rPr>
               <a:t>약속 2</a:t>
@@ -5130,13 +5386,13 @@
       </p:sp>
       <p:sp>
         <p:nvSpPr>
-          <p:cNvPr id="12" name="TextBox 11"/>
+          <p:cNvPr id="15" name="TextBox 14"/>
           <p:cNvSpPr txBox="1"/>
           <p:nvPr/>
         </p:nvSpPr>
         <p:spPr>
           <a:xfrm>
-            <a:off x="4297680" y="2788920"/>
+            <a:off x="4297680" y="2971800"/>
             <a:ext cx="7071055" cy="914400"/>
           </a:xfrm>
           <a:prstGeom prst="rect">
@@ -5158,7 +5414,7 @@
             <a:r>
               <a:rPr sz="1700" b="0" i="0">
                 <a:solidFill>
-                  <a:srgbClr val="2B2B2B"/>
+                  <a:srgbClr val="26231F"/>
                 </a:solidFill>
               </a:rPr>
               <a:t>하루 십 분 나에게 쓰는 시간</a:t>
@@ -5168,27 +5424,25 @@
       </p:sp>
       <p:sp>
         <p:nvSpPr>
-          <p:cNvPr id="13" name="줄 3"/>
+          <p:cNvPr id="16" name="줄 3"/>
           <p:cNvSpPr/>
           <p:nvPr/>
         </p:nvSpPr>
         <p:spPr>
           <a:xfrm>
-            <a:off x="640080" y="3886200"/>
+            <a:off x="640080" y="4069080"/>
             <a:ext cx="10911535" cy="1005840"/>
           </a:xfrm>
           <a:prstGeom prst="roundRect">
             <a:avLst>
-              <a:gd name="adj" fmla="val 8000"/>
+              <a:gd name="adj" fmla="val 4000"/>
             </a:avLst>
           </a:prstGeom>
           <a:solidFill>
-            <a:srgbClr val="EEFCF7"/>
+            <a:srgbClr val="EAFDF7"/>
           </a:solidFill>
-          <a:ln w="12700">
-            <a:solidFill>
-              <a:srgbClr val="D1FAEC"/>
-            </a:solidFill>
+          <a:ln>
+            <a:noFill/>
           </a:ln>
         </p:spPr>
         <p:txBody>
@@ -5201,20 +5455,49 @@
       </p:sp>
       <p:sp>
         <p:nvSpPr>
-          <p:cNvPr id="14" name="번호 3"/>
+          <p:cNvPr id="17" name="포인트 막대"/>
           <p:cNvSpPr/>
           <p:nvPr/>
         </p:nvSpPr>
         <p:spPr>
           <a:xfrm>
-            <a:off x="822959" y="4160520"/>
+            <a:off x="640080" y="4178808"/>
+            <a:ext cx="54864" cy="786384"/>
+          </a:xfrm>
+          <a:prstGeom prst="rect">
+            <a:avLst/>
+          </a:prstGeom>
+          <a:solidFill>
+            <a:srgbClr val="7BEAC5"/>
+          </a:solidFill>
+          <a:ln>
+            <a:noFill/>
+          </a:ln>
+        </p:spPr>
+        <p:txBody>
+          <a:bodyPr rtlCol="0" anchor="ctr"/>
+          <a:lstStyle/>
+          <a:p>
+            <a:pPr algn="ctr"/>
+          </a:p>
+        </p:txBody>
+      </p:sp>
+      <p:sp>
+        <p:nvSpPr>
+          <p:cNvPr id="18" name="번호 3"/>
+          <p:cNvSpPr/>
+          <p:nvPr/>
+        </p:nvSpPr>
+        <p:spPr>
+          <a:xfrm>
+            <a:off x="822959" y="4343400"/>
             <a:ext cx="457200" cy="457200"/>
           </a:xfrm>
           <a:prstGeom prst="ellipse">
             <a:avLst/>
           </a:prstGeom>
           <a:solidFill>
-            <a:srgbClr val="26C590"/>
+            <a:srgbClr val="7BEAC5"/>
           </a:solidFill>
           <a:ln>
             <a:noFill/>
@@ -5234,7 +5517,7 @@
             <a:r>
               <a:rPr sz="1600" b="1" i="0">
                 <a:solidFill>
-                  <a:srgbClr val="FFFFFF"/>
+                  <a:srgbClr val="26231F"/>
                 </a:solidFill>
               </a:rPr>
               <a:t>3</a:t>
@@ -5244,13 +5527,13 @@
       </p:sp>
       <p:sp>
         <p:nvSpPr>
-          <p:cNvPr id="15" name="TextBox 14"/>
+          <p:cNvPr id="19" name="TextBox 18"/>
           <p:cNvSpPr txBox="1"/>
           <p:nvPr/>
         </p:nvSpPr>
         <p:spPr>
           <a:xfrm>
-            <a:off x="1508760" y="3931920"/>
+            <a:off x="1508760" y="4114800"/>
             <a:ext cx="2743200" cy="914400"/>
           </a:xfrm>
           <a:prstGeom prst="rect">
@@ -5272,7 +5555,7 @@
             <a:r>
               <a:rPr sz="1800" b="1" i="0">
                 <a:solidFill>
-                  <a:srgbClr val="115F45"/>
+                  <a:srgbClr val="27493E"/>
                 </a:solidFill>
               </a:rPr>
               <a:t>약속 3</a:t>
@@ -5282,13 +5565,13 @@
       </p:sp>
       <p:sp>
         <p:nvSpPr>
-          <p:cNvPr id="16" name="TextBox 15"/>
+          <p:cNvPr id="20" name="TextBox 19"/>
           <p:cNvSpPr txBox="1"/>
           <p:nvPr/>
         </p:nvSpPr>
         <p:spPr>
           <a:xfrm>
-            <a:off x="4297680" y="3931920"/>
+            <a:off x="4297680" y="4114800"/>
             <a:ext cx="7071055" cy="914400"/>
           </a:xfrm>
           <a:prstGeom prst="rect">
@@ -5310,7 +5593,7 @@
             <a:r>
               <a:rPr sz="1700" b="0" i="0">
                 <a:solidFill>
-                  <a:srgbClr val="2B2B2B"/>
+                  <a:srgbClr val="26231F"/>
                 </a:solidFill>
               </a:rPr>
               <a:t>안부를 전할 사람 한 명 챙기기</a:t>
@@ -5332,7 +5615,7 @@
     <p:bg>
       <p:bgPr>
         <a:solidFill>
-          <a:srgbClr val="FFFFFF"/>
+          <a:srgbClr val="EAFDF7"/>
         </a:solidFill>
         <a:effectLst/>
       </p:bgPr>
@@ -5352,14 +5635,14 @@
         </p:nvSpPr>
         <p:spPr>
           <a:xfrm>
-            <a:off x="9905695" y="-1463040"/>
-            <a:ext cx="3840480" cy="3840480"/>
-          </a:xfrm>
-          <a:prstGeom prst="ellipse">
+            <a:off x="640080" y="566928"/>
+            <a:ext cx="10911535" cy="10972"/>
+          </a:xfrm>
+          <a:prstGeom prst="rect">
             <a:avLst/>
           </a:prstGeom>
           <a:solidFill>
-            <a:srgbClr val="D1FAEC"/>
+            <a:srgbClr val="26231F"/>
           </a:solidFill>
           <a:ln>
             <a:noFill/>
@@ -5375,20 +5658,58 @@
       </p:sp>
       <p:sp>
         <p:nvSpPr>
-          <p:cNvPr id="4" name="장식"/>
+          <p:cNvPr id="4" name="상단 라벨"/>
+          <p:cNvSpPr txBox="1"/>
+          <p:nvPr/>
+        </p:nvSpPr>
+        <p:spPr>
+          <a:xfrm>
+            <a:off x="640080" y="237744"/>
+            <a:ext cx="5486400" cy="274320"/>
+          </a:xfrm>
+          <a:prstGeom prst="rect">
+            <a:avLst/>
+          </a:prstGeom>
+          <a:noFill/>
+        </p:spPr>
+        <p:txBody>
+          <a:bodyPr wrap="square" lIns="54864" rIns="54864" tIns="27432" bIns="27432" anchor="ctr">
+            <a:noAutofit/>
+          </a:bodyPr>
+          <a:lstStyle/>
+          <a:p>
+            <a:pPr algn="l">
+              <a:lnSpc>
+                <a:spcPct val="115000"/>
+              </a:lnSpc>
+            </a:pPr>
+            <a:r>
+              <a:rPr sz="900" b="1" i="0" spc="250">
+                <a:solidFill>
+                  <a:srgbClr val="26231F"/>
+                </a:solidFill>
+              </a:rPr>
+              <a:t>FAMILY ALBUM</a:t>
+            </a:r>
+          </a:p>
+        </p:txBody>
+      </p:sp>
+      <p:sp>
+        <p:nvSpPr>
+          <p:cNvPr id="5" name="포인트"/>
           <p:cNvSpPr/>
           <p:nvPr/>
         </p:nvSpPr>
         <p:spPr>
           <a:xfrm>
-            <a:off x="11094415" y="274320"/>
-            <a:ext cx="411480" cy="411480"/>
-          </a:xfrm>
-          <a:prstGeom prst="ellipse">
+            <a:off x="11204143" y="246888"/>
+            <a:ext cx="237744" cy="237744"/>
+          </a:xfrm>
+          <a:prstGeom prst="star4">
             <a:avLst/>
           </a:prstGeom>
           <a:solidFill>
-            <a:srgbClr val="26C590"/>
+            <a:srgbClr val="7BEAC5"/>
           </a:solidFill>
           <a:ln>
             <a:noFill/>
@@ -5414,8 +5735,8 @@
         </p:nvSpPr>
         <p:spPr>
           <a:xfrm>
-            <a:off x="640080" y="457200"/>
-            <a:ext cx="9722815" cy="868680"/>
+            <a:off x="640080" y="731520"/>
+            <a:ext cx="10911535" cy="822960"/>
           </a:xfrm>
         </p:spPr>
         <p:txBody>
@@ -5432,7 +5753,7 @@
             <a:r>
               <a:rPr sz="3000" b="1" i="0">
                 <a:solidFill>
-                  <a:srgbClr val="115F45"/>
+                  <a:srgbClr val="26231F"/>
                 </a:solidFill>
               </a:rPr>
               <a:t>가족 사진</a:t>
@@ -5442,14 +5763,14 @@
       </p:sp>
       <p:sp>
         <p:nvSpPr>
-          <p:cNvPr id="5" name="사진 자리"/>
+          <p:cNvPr id="6" name="사진 자리"/>
           <p:cNvSpPr/>
           <p:nvPr/>
         </p:nvSpPr>
         <p:spPr>
           <a:xfrm>
-            <a:off x="640080" y="1600200"/>
-            <a:ext cx="3515258" cy="2308860"/>
+            <a:off x="640080" y="1783080"/>
+            <a:ext cx="3515258" cy="2194560"/>
           </a:xfrm>
           <a:prstGeom prst="roundRect">
             <a:avLst>
@@ -5460,9 +5781,7 @@
             <a:srgbClr val="D1FAEC"/>
           </a:solidFill>
           <a:ln w="19050">
-            <a:solidFill>
-              <a:srgbClr val="26C590"/>
-            </a:solidFill>
+            <a:noFill/>
             <a:prstDash val="dash"/>
           </a:ln>
         </p:spPr>
@@ -5480,7 +5799,7 @@
             <a:r>
               <a:rPr sz="1200" b="0" i="0">
                 <a:solidFill>
-                  <a:srgbClr val="115F45"/>
+                  <a:srgbClr val="8E8780"/>
                 </a:solidFill>
               </a:rPr>
               <a:t>사진 1</a:t>
@@ -5490,14 +5809,14 @@
       </p:sp>
       <p:sp>
         <p:nvSpPr>
-          <p:cNvPr id="6" name="사진 자리"/>
+          <p:cNvPr id="7" name="사진 자리"/>
           <p:cNvSpPr/>
           <p:nvPr/>
         </p:nvSpPr>
         <p:spPr>
           <a:xfrm>
-            <a:off x="4338218" y="1600200"/>
-            <a:ext cx="3515258" cy="2308860"/>
+            <a:off x="4338218" y="1783080"/>
+            <a:ext cx="3515258" cy="2194560"/>
           </a:xfrm>
           <a:prstGeom prst="roundRect">
             <a:avLst>
@@ -5508,9 +5827,7 @@
             <a:srgbClr val="D1FAEC"/>
           </a:solidFill>
           <a:ln w="19050">
-            <a:solidFill>
-              <a:srgbClr val="26C590"/>
-            </a:solidFill>
+            <a:noFill/>
             <a:prstDash val="dash"/>
           </a:ln>
         </p:spPr>
@@ -5528,7 +5845,7 @@
             <a:r>
               <a:rPr sz="1200" b="0" i="0">
                 <a:solidFill>
-                  <a:srgbClr val="115F45"/>
+                  <a:srgbClr val="8E8780"/>
                 </a:solidFill>
               </a:rPr>
               <a:t>사진 2</a:t>
@@ -5538,14 +5855,14 @@
       </p:sp>
       <p:sp>
         <p:nvSpPr>
-          <p:cNvPr id="7" name="사진 자리"/>
+          <p:cNvPr id="8" name="사진 자리"/>
           <p:cNvSpPr/>
           <p:nvPr/>
         </p:nvSpPr>
         <p:spPr>
           <a:xfrm>
-            <a:off x="8036356" y="1600200"/>
-            <a:ext cx="3515258" cy="2308860"/>
+            <a:off x="8036356" y="1783080"/>
+            <a:ext cx="3515258" cy="2194560"/>
           </a:xfrm>
           <a:prstGeom prst="roundRect">
             <a:avLst>
@@ -5556,9 +5873,7 @@
             <a:srgbClr val="D1FAEC"/>
           </a:solidFill>
           <a:ln w="19050">
-            <a:solidFill>
-              <a:srgbClr val="26C590"/>
-            </a:solidFill>
+            <a:noFill/>
             <a:prstDash val="dash"/>
           </a:ln>
         </p:spPr>
@@ -5576,7 +5891,7 @@
             <a:r>
               <a:rPr sz="1200" b="0" i="0">
                 <a:solidFill>
-                  <a:srgbClr val="115F45"/>
+                  <a:srgbClr val="8E8780"/>
                 </a:solidFill>
               </a:rPr>
               <a:t>사진 3</a:t>
@@ -5586,14 +5901,14 @@
       </p:sp>
       <p:sp>
         <p:nvSpPr>
-          <p:cNvPr id="8" name="사진 자리"/>
+          <p:cNvPr id="9" name="사진 자리"/>
           <p:cNvSpPr/>
           <p:nvPr/>
         </p:nvSpPr>
         <p:spPr>
           <a:xfrm>
-            <a:off x="640080" y="4091939"/>
-            <a:ext cx="3515258" cy="2308860"/>
+            <a:off x="640080" y="4160520"/>
+            <a:ext cx="3515258" cy="2194560"/>
           </a:xfrm>
           <a:prstGeom prst="roundRect">
             <a:avLst>
@@ -5604,9 +5919,7 @@
             <a:srgbClr val="D1FAEC"/>
           </a:solidFill>
           <a:ln w="19050">
-            <a:solidFill>
-              <a:srgbClr val="26C590"/>
-            </a:solidFill>
+            <a:noFill/>
             <a:prstDash val="dash"/>
           </a:ln>
         </p:spPr>
@@ -5624,7 +5937,7 @@
             <a:r>
               <a:rPr sz="1200" b="0" i="0">
                 <a:solidFill>
-                  <a:srgbClr val="115F45"/>
+                  <a:srgbClr val="8E8780"/>
                 </a:solidFill>
               </a:rPr>
               <a:t>사진 4</a:t>
@@ -5634,14 +5947,14 @@
       </p:sp>
       <p:sp>
         <p:nvSpPr>
-          <p:cNvPr id="9" name="사진 자리"/>
+          <p:cNvPr id="10" name="사진 자리"/>
           <p:cNvSpPr/>
           <p:nvPr/>
         </p:nvSpPr>
         <p:spPr>
           <a:xfrm>
-            <a:off x="4338218" y="4091939"/>
-            <a:ext cx="3515258" cy="2308860"/>
+            <a:off x="4338218" y="4160520"/>
+            <a:ext cx="3515258" cy="2194560"/>
           </a:xfrm>
           <a:prstGeom prst="roundRect">
             <a:avLst>
@@ -5652,9 +5965,7 @@
             <a:srgbClr val="D1FAEC"/>
           </a:solidFill>
           <a:ln w="19050">
-            <a:solidFill>
-              <a:srgbClr val="26C590"/>
-            </a:solidFill>
+            <a:noFill/>
             <a:prstDash val="dash"/>
           </a:ln>
         </p:spPr>
@@ -5672,7 +5983,7 @@
             <a:r>
               <a:rPr sz="1200" b="0" i="0">
                 <a:solidFill>
-                  <a:srgbClr val="115F45"/>
+                  <a:srgbClr val="8E8780"/>
                 </a:solidFill>
               </a:rPr>
               <a:t>사진 5</a:t>
@@ -5682,14 +5993,14 @@
       </p:sp>
       <p:sp>
         <p:nvSpPr>
-          <p:cNvPr id="10" name="사진 자리"/>
+          <p:cNvPr id="11" name="사진 자리"/>
           <p:cNvSpPr/>
           <p:nvPr/>
         </p:nvSpPr>
         <p:spPr>
           <a:xfrm>
-            <a:off x="8036356" y="4091939"/>
-            <a:ext cx="3515258" cy="2308860"/>
+            <a:off x="8036356" y="4160520"/>
+            <a:ext cx="3515258" cy="2194560"/>
           </a:xfrm>
           <a:prstGeom prst="roundRect">
             <a:avLst>
@@ -5700,9 +6011,7 @@
             <a:srgbClr val="D1FAEC"/>
           </a:solidFill>
           <a:ln w="19050">
-            <a:solidFill>
-              <a:srgbClr val="26C590"/>
-            </a:solidFill>
+            <a:noFill/>
             <a:prstDash val="dash"/>
           </a:ln>
         </p:spPr>
@@ -5720,7 +6029,7 @@
             <a:r>
               <a:rPr sz="1200" b="0" i="0">
                 <a:solidFill>
-                  <a:srgbClr val="115F45"/>
+                  <a:srgbClr val="8E8780"/>
                 </a:solidFill>
               </a:rPr>
               <a:t>사진 6</a:t>
@@ -5739,6 +6048,14 @@
 <file path=ppt/slides/slide6.xml><?xml version="1.0" encoding="utf-8"?>
 <p:sld xmlns:a="http://schemas.openxmlformats.org/drawingml/2006/main" xmlns:p="http://schemas.openxmlformats.org/presentationml/2006/main" xmlns:r="http://schemas.openxmlformats.org/officeDocument/2006/relationships">
   <p:cSld>
+    <p:bg>
+      <p:bgPr>
+        <a:solidFill>
+          <a:srgbClr val="EAFDF7"/>
+        </a:solidFill>
+        <a:effectLst/>
+      </p:bgPr>
+    </p:bg>
     <p:spTree>
       <p:nvGrpSpPr>
         <p:cNvPr id="1" name=""/>
@@ -5746,30 +6063,116 @@
         <p:nvPr/>
       </p:nvGrpSpPr>
       <p:grpSpPr/>
-      <p:pic>
-        <p:nvPicPr>
-          <p:cNvPr id="3" name="표지 그림" descr="family-19.jpg"/>
-          <p:cNvPicPr>
-            <a:picLocks noChangeAspect="1"/>
-          </p:cNvPicPr>
-          <p:nvPr/>
-        </p:nvPicPr>
-        <p:blipFill>
-          <a:blip r:embed="rId2"/>
-          <a:stretch>
-            <a:fillRect/>
-          </a:stretch>
-        </p:blipFill>
-        <p:spPr>
-          <a:xfrm>
-            <a:off x="0" y="0"/>
-            <a:ext cx="12191695" cy="6858000"/>
+      <p:sp>
+        <p:nvSpPr>
+          <p:cNvPr id="3" name="사진 자리"/>
+          <p:cNvSpPr/>
+          <p:nvPr/>
+        </p:nvSpPr>
+        <p:spPr>
+          <a:xfrm>
+            <a:off x="7802684" y="0"/>
+            <a:ext cx="4389010" cy="6858000"/>
           </a:xfrm>
           <a:prstGeom prst="rect">
             <a:avLst/>
           </a:prstGeom>
-        </p:spPr>
-      </p:pic>
+          <a:solidFill>
+            <a:srgbClr val="A5F3D9"/>
+          </a:solidFill>
+          <a:ln>
+            <a:noFill/>
+          </a:ln>
+        </p:spPr>
+        <p:txBody>
+          <a:bodyPr rtlCol="0" anchor="ctr" wrap="square" lIns="54864" rIns="54864" tIns="27432" bIns="27432">
+            <a:noAutofit/>
+          </a:bodyPr>
+          <a:lstStyle/>
+          <a:p>
+            <a:pPr algn="ctr">
+              <a:lnSpc>
+                <a:spcPct val="100000"/>
+              </a:lnSpc>
+            </a:pPr>
+            <a:r>
+              <a:rPr sz="1400" b="0" i="0">
+                <a:solidFill>
+                  <a:srgbClr val="27493E"/>
+                </a:solidFill>
+              </a:rPr>
+              <a:t>사진을 넣어 주세요</a:t>
+            </a:r>
+          </a:p>
+        </p:txBody>
+      </p:sp>
+      <p:sp>
+        <p:nvSpPr>
+          <p:cNvPr id="4" name="장식"/>
+          <p:cNvSpPr/>
+          <p:nvPr/>
+        </p:nvSpPr>
+        <p:spPr>
+          <a:xfrm>
+            <a:off x="8168435" y="365760"/>
+            <a:ext cx="3657508" cy="6126480"/>
+          </a:xfrm>
+          <a:prstGeom prst="rect">
+            <a:avLst/>
+          </a:prstGeom>
+          <a:noFill/>
+          <a:ln w="9525">
+            <a:solidFill>
+              <a:srgbClr val="26231F"/>
+            </a:solidFill>
+          </a:ln>
+        </p:spPr>
+        <p:txBody>
+          <a:bodyPr rtlCol="0" anchor="ctr"/>
+          <a:lstStyle/>
+          <a:p>
+            <a:pPr algn="ctr"/>
+          </a:p>
+        </p:txBody>
+      </p:sp>
+      <p:sp>
+        <p:nvSpPr>
+          <p:cNvPr id="5" name="라벨"/>
+          <p:cNvSpPr txBox="1"/>
+          <p:nvPr/>
+        </p:nvSpPr>
+        <p:spPr>
+          <a:xfrm>
+            <a:off x="822960" y="2148840"/>
+            <a:ext cx="5608179" cy="274320"/>
+          </a:xfrm>
+          <a:prstGeom prst="rect">
+            <a:avLst/>
+          </a:prstGeom>
+          <a:noFill/>
+        </p:spPr>
+        <p:txBody>
+          <a:bodyPr wrap="square" lIns="54864" rIns="54864" tIns="27432" bIns="27432" anchor="t">
+            <a:noAutofit/>
+          </a:bodyPr>
+          <a:lstStyle/>
+          <a:p>
+            <a:pPr algn="l">
+              <a:lnSpc>
+                <a:spcPct val="115000"/>
+              </a:lnSpc>
+            </a:pPr>
+            <a:r>
+              <a:rPr sz="1000" b="1" i="0" spc="250">
+                <a:solidFill>
+                  <a:srgbClr val="26231F"/>
+                </a:solidFill>
+              </a:rPr>
+              <a:t>FAMILY ALBUM</a:t>
+            </a:r>
+          </a:p>
+        </p:txBody>
+      </p:sp>
       <p:sp>
         <p:nvSpPr>
           <p:cNvPr id="2" name="Title 1"/>
@@ -5782,8 +6185,8 @@
         </p:nvSpPr>
         <p:spPr>
           <a:xfrm>
-            <a:off x="853418" y="2057400"/>
-            <a:ext cx="6095847" cy="1554480"/>
+            <a:off x="822960" y="2606040"/>
+            <a:ext cx="5608179" cy="1188720"/>
           </a:xfrm>
         </p:spPr>
         <p:txBody>
@@ -5798,9 +6201,9 @@
               </a:lnSpc>
             </a:pPr>
             <a:r>
-              <a:rPr sz="3600" b="1" i="0">
-                <a:solidFill>
-                  <a:srgbClr val="115F45"/>
+              <a:rPr sz="4000" b="1" i="0">
+                <a:solidFill>
+                  <a:srgbClr val="26231F"/>
                 </a:solidFill>
               </a:rPr>
               <a:t>우리 가족 소개를 마칩니다</a:t>
@@ -5810,14 +6213,14 @@
       </p:sp>
       <p:sp>
         <p:nvSpPr>
-          <p:cNvPr id="4" name="한 줄 문구"/>
+          <p:cNvPr id="6" name="한 줄 문구"/>
           <p:cNvSpPr txBox="1"/>
           <p:nvPr/>
         </p:nvSpPr>
         <p:spPr>
           <a:xfrm>
-            <a:off x="853418" y="3749039"/>
-            <a:ext cx="6095847" cy="822960"/>
+            <a:off x="822960" y="3886200"/>
+            <a:ext cx="5608179" cy="822960"/>
           </a:xfrm>
           <a:prstGeom prst="rect">
             <a:avLst/>
@@ -5836,9 +6239,9 @@
               </a:lnSpc>
             </a:pPr>
             <a:r>
-              <a:rPr sz="1700" b="0" i="1">
-                <a:solidFill>
-                  <a:srgbClr val="115F45"/>
+              <a:rPr sz="1700" b="0" i="0">
+                <a:solidFill>
+                  <a:srgbClr val="26231F"/>
                 </a:solidFill>
               </a:rPr>
               <a:t>읽어 주셔서 고맙습니다</a:t>
@@ -5848,14 +6251,14 @@
       </p:sp>
       <p:sp>
         <p:nvSpPr>
-          <p:cNvPr id="5" name="안내 문구"/>
+          <p:cNvPr id="7" name="안내 문구"/>
           <p:cNvSpPr txBox="1"/>
           <p:nvPr/>
         </p:nvSpPr>
         <p:spPr>
           <a:xfrm>
-            <a:off x="853418" y="4617720"/>
-            <a:ext cx="6095847" cy="914400"/>
+            <a:off x="822960" y="4754880"/>
+            <a:ext cx="5608179" cy="914400"/>
           </a:xfrm>
           <a:prstGeom prst="rect">
             <a:avLst/>
@@ -5876,7 +6279,7 @@
             <a:r>
               <a:rPr sz="1400" b="0" i="0">
                 <a:solidFill>
-                  <a:srgbClr val="666666"/>
+                  <a:srgbClr val="26231F"/>
                 </a:solidFill>
               </a:rPr>
               <a:t>고맙습니다 · 가족 이름</a:t>
@@ -5903,34 +6306,34 @@
         <a:sysClr val="window" lastClr="FFFFFF"/>
       </a:lt1>
       <a:dk2>
-        <a:srgbClr val="115F45"/>
+        <a:srgbClr val="27493E"/>
       </a:dk2>
       <a:lt2>
-        <a:srgbClr val="EEFCF7"/>
+        <a:srgbClr val="EAFDF7"/>
       </a:lt2>
       <a:accent1>
-        <a:srgbClr val="26C590"/>
+        <a:srgbClr val="7BEAC5"/>
       </a:accent1>
       <a:accent2>
-        <a:srgbClr val="209DB6"/>
+        <a:srgbClr val="9FE5EF"/>
       </a:accent2>
       <a:accent3>
-        <a:srgbClr val="115F45"/>
+        <a:srgbClr val="27493E"/>
       </a:accent3>
       <a:accent4>
         <a:srgbClr val="D1FAEC"/>
       </a:accent4>
       <a:accent5>
-        <a:srgbClr val="23B1A3"/>
+        <a:srgbClr val="8DE8DA"/>
       </a:accent5>
       <a:accent6>
-        <a:srgbClr val="709F8F"/>
+        <a:srgbClr val="7D928B"/>
       </a:accent6>
       <a:hlink>
-        <a:srgbClr val="26C590"/>
+        <a:srgbClr val="7BEAC5"/>
       </a:hlink>
       <a:folHlink>
-        <a:srgbClr val="115F45"/>
+        <a:srgbClr val="27493E"/>
       </a:folHlink>
     </a:clrScheme>
     <a:fontScheme name="Office">
